--- a/agentic_coding_workshop.pptx
+++ b/agentic_coding_workshop.pptx
@@ -5,27 +5,29 @@
     <p:sldMasterId id="2147483648" r:id="rId1"/>
   </p:sldMasterIdLst>
   <p:notesMasterIdLst>
-    <p:notesMasterId r:id="rId20"/>
+    <p:notesMasterId r:id="rId22"/>
   </p:notesMasterIdLst>
   <p:sldIdLst>
     <p:sldId id="256" r:id="rId2"/>
-    <p:sldId id="258" r:id="rId3"/>
-    <p:sldId id="259" r:id="rId4"/>
-    <p:sldId id="260" r:id="rId5"/>
-    <p:sldId id="261" r:id="rId6"/>
-    <p:sldId id="262" r:id="rId7"/>
-    <p:sldId id="263" r:id="rId8"/>
-    <p:sldId id="264" r:id="rId9"/>
-    <p:sldId id="265" r:id="rId10"/>
-    <p:sldId id="266" r:id="rId11"/>
-    <p:sldId id="267" r:id="rId12"/>
-    <p:sldId id="268" r:id="rId13"/>
-    <p:sldId id="272" r:id="rId14"/>
-    <p:sldId id="269" r:id="rId15"/>
-    <p:sldId id="271" r:id="rId16"/>
-    <p:sldId id="270" r:id="rId17"/>
-    <p:sldId id="352" r:id="rId18"/>
-    <p:sldId id="300" r:id="rId19"/>
+    <p:sldId id="353" r:id="rId3"/>
+    <p:sldId id="354" r:id="rId4"/>
+    <p:sldId id="259" r:id="rId5"/>
+    <p:sldId id="260" r:id="rId6"/>
+    <p:sldId id="261" r:id="rId7"/>
+    <p:sldId id="262" r:id="rId8"/>
+    <p:sldId id="263" r:id="rId9"/>
+    <p:sldId id="264" r:id="rId10"/>
+    <p:sldId id="265" r:id="rId11"/>
+    <p:sldId id="266" r:id="rId12"/>
+    <p:sldId id="267" r:id="rId13"/>
+    <p:sldId id="268" r:id="rId14"/>
+    <p:sldId id="272" r:id="rId15"/>
+    <p:sldId id="269" r:id="rId16"/>
+    <p:sldId id="271" r:id="rId17"/>
+    <p:sldId id="270" r:id="rId18"/>
+    <p:sldId id="352" r:id="rId19"/>
+    <p:sldId id="300" r:id="rId20"/>
+    <p:sldId id="355" r:id="rId21"/>
   </p:sldIdLst>
   <p:sldSz cx="12192000" cy="6858000"/>
   <p:notesSz cx="6858000" cy="9144000"/>
@@ -134,6 +136,7 @@
 
 <file path=ppt/authors.xml><?xml version="1.0" encoding="utf-8"?>
 <p188:authorLst xmlns:a="http://schemas.openxmlformats.org/drawingml/2006/main" xmlns:r="http://schemas.openxmlformats.org/officeDocument/2006/relationships" xmlns:p188="http://schemas.microsoft.com/office/powerpoint/2018/8/main">
+  <p188:author id="{D621C295-2579-9CF5-0A5A-C9EFD0ECDFFE}" name="Serena Sritharan" initials="SS" userId="S::serena.sritharan@helmholtz-munich.de::688c4a1b-6dbd-4f52-ae97-242ba5053018" providerId="AD"/>
   <p188:author id="{789779D1-B596-6A16-9C62-7B9D1EFCA3C1}" name="Donatella Cea" initials="DC" userId="S::donatella.cea@helmholtz-munich.de::29f22025-798f-4398-b396-4a1bb3d82861" providerId="AD"/>
 </p188:authorLst>
 </file>
@@ -141,43 +144,45 @@
 <file path=ppt/revisionInfo.xml><?xml version="1.0" encoding="utf-8"?>
 <p1510:revInfo xmlns:a="http://schemas.openxmlformats.org/drawingml/2006/main" xmlns:r="http://schemas.openxmlformats.org/officeDocument/2006/relationships" xmlns:p1510="http://schemas.microsoft.com/office/powerpoint/2015/10/main">
   <p1510:revLst>
+    <p1510:client id="{00000000-0000-0000-0000-000000000000}" v="33" dt="2026-09-30T12:39:59.789"/>
     <p1510:client id="{6D32B66A-7F52-BE46-8892-14610C4870D4}" v="2" dt="2026-09-30T10:49:16.953"/>
   </p1510:revLst>
 </p1510:revInfo>
 </file>
 
-<file path=ppt/comments/modernComment_102_7F3B7567.xml><?xml version="1.0" encoding="utf-8"?>
+<file path=ppt/comments/modernComment_105_8546D568.xml><?xml version="1.0" encoding="utf-8"?>
 <p188:cmLst xmlns:a="http://schemas.openxmlformats.org/drawingml/2006/main" xmlns:r="http://schemas.openxmlformats.org/officeDocument/2006/relationships" xmlns:p188="http://schemas.microsoft.com/office/powerpoint/2018/8/main">
-  <p188:cm id="{1A4A9277-10AD-4D96-889B-FA0EAF919E61}" authorId="{789779D1-B596-6A16-9C62-7B9D1EFCA3C1}" status="resolved" created="2025-10-01T08:44:47.235">
-    <ac:deMkLst xmlns:ac="http://schemas.microsoft.com/office/drawing/2013/main/command">
+  <p188:cm id="{21FDDEAD-4AEA-469D-B1D6-537E824A6D3C}" authorId="{D621C295-2579-9CF5-0A5A-C9EFD0ECDFFE}" created="2026-09-30T12:37:49.194">
+    <ac:txMkLst xmlns:ac="http://schemas.microsoft.com/office/drawing/2013/main/command">
       <pc:docMk xmlns:pc="http://schemas.microsoft.com/office/powerpoint/2013/main/command"/>
-      <pc:sldMk xmlns:pc="http://schemas.microsoft.com/office/powerpoint/2013/main/command" cId="2134603111" sldId="258"/>
-      <ac:picMk id="4" creationId="{A87C231F-076A-3161-34A9-C5140C727512}"/>
-    </ac:deMkLst>
+      <pc:sldMk xmlns:pc="http://schemas.microsoft.com/office/powerpoint/2013/main/command" cId="2236011880" sldId="261"/>
+      <ac:spMk id="3" creationId="{B905B855-2EB1-93E8-3F11-77FBD97AA10D}"/>
+      <ac:txMk cp="175" len="32">
+        <ac:context len="208" hash="148950639"/>
+      </ac:txMk>
+    </ac:txMkLst>
+    <p188:pos x="3676834" y="4076330"/>
+    <p188:replyLst>
+      <p188:reply id="{EA9E204D-AC00-461A-BB41-708231446A46}" authorId="{D621C295-2579-9CF5-0A5A-C9EFD0ECDFFE}" created="2026-09-30T12:38:29.945">
+        <p188:txBody>
+          <a:bodyPr/>
+          <a:lstStyle/>
+          <a:p>
+            <a:r>
+              <a:rPr lang="en-US"/>
+              <a:t>or mishap</a:t>
+            </a:r>
+          </a:p>
+        </p188:txBody>
+      </p188:reply>
+    </p188:replyLst>
     <p188:txBody>
       <a:bodyPr/>
       <a:lstStyle/>
       <a:p>
         <a:r>
-          <a:rPr lang="en-GB"/>
-          <a:t>Remember to add Danu if we use some parts of his material</a:t>
-        </a:r>
-      </a:p>
-    </p188:txBody>
-  </p188:cm>
-  <p188:cm id="{B831EE72-2964-46CC-BA98-876B413605F0}" authorId="{789779D1-B596-6A16-9C62-7B9D1EFCA3C1}" status="resolved" created="2025-10-01T08:45:04.782">
-    <ac:deMkLst xmlns:ac="http://schemas.microsoft.com/office/drawing/2013/main/command">
-      <pc:docMk xmlns:pc="http://schemas.microsoft.com/office/powerpoint/2013/main/command"/>
-      <pc:sldMk xmlns:pc="http://schemas.microsoft.com/office/powerpoint/2013/main/command" cId="2134603111" sldId="258"/>
-      <ac:grpSpMk id="23" creationId="{F6D446E8-4EB5-5227-DF77-14CB22F3785B}"/>
-    </ac:deMkLst>
-    <p188:txBody>
-      <a:bodyPr/>
-      <a:lstStyle/>
-      <a:p>
-        <a:r>
-          <a:rPr lang="en-GB"/>
-          <a:t>Add Serena's pic</a:t>
+          <a:rPr lang="en-US"/>
+          <a:t>[@Karol Szustakowski]is this supposed to be a link?</a:t>
         </a:r>
       </a:p>
     </p188:txBody>
@@ -267,7 +272,7 @@
           <a:p>
             <a:fld id="{E9D6095D-AF69-4049-AC57-D67C18976B26}" type="datetimeFigureOut">
               <a:rPr lang="en-US" smtClean="0"/>
-              <a:t>9/30/26</a:t>
+              <a:t>9/30/2026</a:t>
             </a:fld>
             <a:endParaRPr lang="en-US"/>
           </a:p>
@@ -642,7 +647,7 @@
           <a:lstStyle/>
           <a:p>
             <a:fld id="{CD421C69-B21D-4D84-AAC3-223EB2AF232A}" type="slidenum">
-              <a:t>18</a:t>
+              <a:t>19</a:t>
             </a:fld>
             <a:endParaRPr lang="en-US"/>
           </a:p>
@@ -1033,7 +1038,7 @@
             <a:fld id="{4212A532-6B12-6643-A678-AA9055583282}" type="datetimeFigureOut">
               <a:rPr lang="en-US" smtClean="0"/>
               <a:pPr/>
-              <a:t>9/30/26</a:t>
+              <a:t>9/30/2026</a:t>
             </a:fld>
             <a:endParaRPr lang="en-US"/>
           </a:p>
@@ -1412,7 +1417,7 @@
           <a:p>
             <a:fld id="{4212A532-6B12-6643-A678-AA9055583282}" type="datetimeFigureOut">
               <a:rPr lang="en-US" smtClean="0"/>
-              <a:t>9/30/26</a:t>
+              <a:t>9/30/2026</a:t>
             </a:fld>
             <a:endParaRPr lang="en-US"/>
           </a:p>
@@ -1588,7 +1593,7 @@
           <a:p>
             <a:fld id="{4212A532-6B12-6643-A678-AA9055583282}" type="datetimeFigureOut">
               <a:rPr lang="en-US" smtClean="0"/>
-              <a:t>9/30/26</a:t>
+              <a:t>9/30/2026</a:t>
             </a:fld>
             <a:endParaRPr lang="en-US"/>
           </a:p>
@@ -1676,7 +1681,7 @@
           <a:p>
             <a:fld id="{4212A532-6B12-6643-A678-AA9055583282}" type="datetimeFigureOut">
               <a:rPr lang="en-US" smtClean="0"/>
-              <a:t>9/30/26</a:t>
+              <a:t>9/30/2026</a:t>
             </a:fld>
             <a:endParaRPr lang="en-US"/>
           </a:p>
@@ -1968,7 +1973,7 @@
           <a:p>
             <a:fld id="{4212A532-6B12-6643-A678-AA9055583282}" type="datetimeFigureOut">
               <a:rPr lang="en-US" smtClean="0"/>
-              <a:t>9/30/26</a:t>
+              <a:t>9/30/2026</a:t>
             </a:fld>
             <a:endParaRPr lang="en-US"/>
           </a:p>
@@ -2234,7 +2239,7 @@
           <a:p>
             <a:fld id="{4212A532-6B12-6643-A678-AA9055583282}" type="datetimeFigureOut">
               <a:rPr lang="en-US" smtClean="0"/>
-              <a:t>9/30/26</a:t>
+              <a:t>9/30/2026</a:t>
             </a:fld>
             <a:endParaRPr lang="en-US"/>
           </a:p>
@@ -2409,7 +2414,7 @@
           <a:p>
             <a:fld id="{4212A532-6B12-6643-A678-AA9055583282}" type="datetimeFigureOut">
               <a:rPr lang="en-US" smtClean="0"/>
-              <a:t>9/30/26</a:t>
+              <a:t>9/30/2026</a:t>
             </a:fld>
             <a:endParaRPr lang="en-US"/>
           </a:p>
@@ -2594,7 +2599,7 @@
           <a:p>
             <a:fld id="{4212A532-6B12-6643-A678-AA9055583282}" type="datetimeFigureOut">
               <a:rPr lang="en-US" smtClean="0"/>
-              <a:t>9/30/26</a:t>
+              <a:t>9/30/2026</a:t>
             </a:fld>
             <a:endParaRPr lang="en-US"/>
           </a:p>
@@ -2711,7 +2716,7 @@
           <a:p>
             <a:fld id="{4212A532-6B12-6643-A678-AA9055583282}" type="datetimeFigureOut">
               <a:rPr lang="en-US" smtClean="0"/>
-              <a:t>9/30/26</a:t>
+              <a:t>9/30/2026</a:t>
             </a:fld>
             <a:endParaRPr lang="en-US"/>
           </a:p>
@@ -2834,7 +2839,7 @@
             <a:fld id="{4212A532-6B12-6643-A678-AA9055583282}" type="datetimeFigureOut">
               <a:rPr lang="en-US" smtClean="0"/>
               <a:pPr/>
-              <a:t>9/30/26</a:t>
+              <a:t>9/30/2026</a:t>
             </a:fld>
             <a:endParaRPr lang="en-US"/>
           </a:p>
@@ -3361,7 +3366,7 @@
           <a:p>
             <a:fld id="{4212A532-6B12-6643-A678-AA9055583282}" type="datetimeFigureOut">
               <a:rPr lang="en-US" smtClean="0"/>
-              <a:t>9/30/26</a:t>
+              <a:t>9/30/2026</a:t>
             </a:fld>
             <a:endParaRPr lang="en-US"/>
           </a:p>
@@ -3546,7 +3551,7 @@
           <a:p>
             <a:fld id="{4212A532-6B12-6643-A678-AA9055583282}" type="datetimeFigureOut">
               <a:rPr lang="en-US" smtClean="0"/>
-              <a:t>9/30/26</a:t>
+              <a:t>9/30/2026</a:t>
             </a:fld>
             <a:endParaRPr lang="en-US"/>
           </a:p>
@@ -4803,7 +4808,7 @@
           <a:p>
             <a:fld id="{4212A532-6B12-6643-A678-AA9055583282}" type="datetimeFigureOut">
               <a:rPr lang="en-US" smtClean="0"/>
-              <a:t>9/30/26</a:t>
+              <a:t>9/30/2026</a:t>
             </a:fld>
             <a:endParaRPr lang="en-US"/>
           </a:p>
@@ -5082,7 +5087,7 @@
           <a:p>
             <a:fld id="{4212A532-6B12-6643-A678-AA9055583282}" type="datetimeFigureOut">
               <a:rPr lang="en-US" smtClean="0"/>
-              <a:t>9/30/26</a:t>
+              <a:t>9/30/2026</a:t>
             </a:fld>
             <a:endParaRPr lang="en-US"/>
           </a:p>
@@ -5485,7 +5490,7 @@
           <a:p>
             <a:fld id="{4212A532-6B12-6643-A678-AA9055583282}" type="datetimeFigureOut">
               <a:rPr lang="en-US" smtClean="0"/>
-              <a:t>9/30/26</a:t>
+              <a:t>9/30/2026</a:t>
             </a:fld>
             <a:endParaRPr lang="en-US"/>
           </a:p>
@@ -5740,7 +5745,7 @@
             <a:fld id="{4212A532-6B12-6643-A678-AA9055583282}" type="datetimeFigureOut">
               <a:rPr lang="en-US" smtClean="0"/>
               <a:pPr/>
-              <a:t>9/30/26</a:t>
+              <a:t>9/30/2026</a:t>
             </a:fld>
             <a:endParaRPr lang="en-US"/>
           </a:p>
@@ -6231,6 +6236,155 @@
         <p:cNvPr id="1" name="">
           <a:extLst>
             <a:ext uri="{FF2B5EF4-FFF2-40B4-BE49-F238E27FC236}">
+              <a16:creationId xmlns:a16="http://schemas.microsoft.com/office/drawing/2014/main" id="{38879A09-4739-5874-F97F-F164C1ECB8BD}"/>
+            </a:ext>
+          </a:extLst>
+        </p:cNvPr>
+        <p:cNvGrpSpPr/>
+        <p:nvPr/>
+      </p:nvGrpSpPr>
+      <p:grpSpPr>
+        <a:xfrm>
+          <a:off x="0" y="0"/>
+          <a:ext cx="0" cy="0"/>
+          <a:chOff x="0" y="0"/>
+          <a:chExt cx="0" cy="0"/>
+        </a:xfrm>
+      </p:grpSpPr>
+      <p:sp>
+        <p:nvSpPr>
+          <p:cNvPr id="2" name="Title 1">
+            <a:extLst>
+              <a:ext uri="{FF2B5EF4-FFF2-40B4-BE49-F238E27FC236}">
+                <a16:creationId xmlns:a16="http://schemas.microsoft.com/office/drawing/2014/main" id="{AC3751AD-6B43-6BA2-4267-9EAE4D9036B5}"/>
+              </a:ext>
+            </a:extLst>
+          </p:cNvPr>
+          <p:cNvSpPr>
+            <a:spLocks noGrp="1"/>
+          </p:cNvSpPr>
+          <p:nvPr>
+            <p:ph type="title"/>
+          </p:nvPr>
+        </p:nvSpPr>
+        <p:spPr/>
+        <p:txBody>
+          <a:bodyPr/>
+          <a:lstStyle/>
+          <a:p>
+            <a:r>
+              <a:rPr lang="en-US" dirty="0"/>
+              <a:t>Design – tech stack</a:t>
+            </a:r>
+          </a:p>
+        </p:txBody>
+      </p:sp>
+      <p:sp>
+        <p:nvSpPr>
+          <p:cNvPr id="3" name="Content Placeholder 2">
+            <a:extLst>
+              <a:ext uri="{FF2B5EF4-FFF2-40B4-BE49-F238E27FC236}">
+                <a16:creationId xmlns:a16="http://schemas.microsoft.com/office/drawing/2014/main" id="{AF8A8254-BE80-995B-4E06-13DEB51780F7}"/>
+              </a:ext>
+            </a:extLst>
+          </p:cNvPr>
+          <p:cNvSpPr>
+            <a:spLocks noGrp="1"/>
+          </p:cNvSpPr>
+          <p:nvPr>
+            <p:ph idx="1"/>
+          </p:nvPr>
+        </p:nvSpPr>
+        <p:spPr>
+          <a:xfrm>
+            <a:off x="838200" y="1825625"/>
+            <a:ext cx="10764795" cy="4351338"/>
+          </a:xfrm>
+        </p:spPr>
+        <p:txBody>
+          <a:bodyPr>
+            <a:normAutofit fontScale="77500" lnSpcReduction="20000"/>
+          </a:bodyPr>
+          <a:lstStyle/>
+          <a:p>
+            <a:pPr marL="0" indent="0">
+              <a:buNone/>
+            </a:pPr>
+            <a:r>
+              <a:rPr lang="en-US" sz="3200" dirty="0"/>
+              <a:t>Drop your </a:t>
+            </a:r>
+            <a:r>
+              <a:rPr lang="en-US" sz="3200" dirty="0" err="1"/>
+              <a:t>SPEC.md</a:t>
+            </a:r>
+            <a:r>
+              <a:rPr lang="en-US" sz="3200" dirty="0"/>
+              <a:t> into an agent, and ask it:</a:t>
+            </a:r>
+          </a:p>
+          <a:p>
+            <a:r>
+              <a:rPr lang="en-US" sz="3200" dirty="0"/>
+              <a:t>Which coding frameworks can be used to achieve this (frontend, backend)?</a:t>
+            </a:r>
+          </a:p>
+          <a:p>
+            <a:r>
+              <a:rPr lang="en-US" sz="3200" dirty="0"/>
+              <a:t>What are the considerations for each of the frameworks. What are the limitations? </a:t>
+            </a:r>
+          </a:p>
+          <a:p>
+            <a:r>
+              <a:rPr lang="en-US" sz="3200" dirty="0"/>
+              <a:t>What is the best pipeline for testing and creating this software with you if my coding expertise is [your coding expertise]?</a:t>
+            </a:r>
+          </a:p>
+          <a:p>
+            <a:r>
+              <a:rPr lang="en-US" sz="3200" dirty="0"/>
+              <a:t>Which framework would you recommend, and why?</a:t>
+            </a:r>
+          </a:p>
+          <a:p>
+            <a:endParaRPr lang="en-US" sz="3200" dirty="0"/>
+          </a:p>
+          <a:p>
+            <a:endParaRPr lang="en-US" sz="3200" dirty="0"/>
+          </a:p>
+          <a:p>
+            <a:pPr marL="0" indent="0">
+              <a:buNone/>
+            </a:pPr>
+            <a:r>
+              <a:rPr lang="en-US" sz="3200" u="sng" dirty="0"/>
+              <a:t>Do not let the agent implement JavaScript or Python or [your language of choice] from scratch! Use a framework!</a:t>
+            </a:r>
+          </a:p>
+        </p:txBody>
+      </p:sp>
+    </p:spTree>
+    <p:extLst>
+      <p:ext uri="{BB962C8B-B14F-4D97-AF65-F5344CB8AC3E}">
+        <p14:creationId xmlns:p14="http://schemas.microsoft.com/office/powerpoint/2010/main" val="450628607"/>
+      </p:ext>
+    </p:extLst>
+  </p:cSld>
+  <p:clrMapOvr>
+    <a:masterClrMapping/>
+  </p:clrMapOvr>
+</p:sld>
+</file>
+
+<file path=ppt/slides/slide11.xml><?xml version="1.0" encoding="utf-8"?>
+<p:sld xmlns:a="http://schemas.openxmlformats.org/drawingml/2006/main" xmlns:r="http://schemas.openxmlformats.org/officeDocument/2006/relationships" xmlns:p="http://schemas.openxmlformats.org/presentationml/2006/main">
+  <p:cSld>
+    <p:spTree>
+      <p:nvGrpSpPr>
+        <p:cNvPr id="1" name="">
+          <a:extLst>
+            <a:ext uri="{FF2B5EF4-FFF2-40B4-BE49-F238E27FC236}">
               <a16:creationId xmlns:a16="http://schemas.microsoft.com/office/drawing/2014/main" id="{3F6B8F83-EAD7-F5A9-AB27-B49B9D2EFD67}"/>
             </a:ext>
           </a:extLst>
@@ -6355,7 +6509,7 @@
 </p:sld>
 </file>
 
-<file path=ppt/slides/slide11.xml><?xml version="1.0" encoding="utf-8"?>
+<file path=ppt/slides/slide12.xml><?xml version="1.0" encoding="utf-8"?>
 <p:sld xmlns:a="http://schemas.openxmlformats.org/drawingml/2006/main" xmlns:r="http://schemas.openxmlformats.org/officeDocument/2006/relationships" xmlns:p="http://schemas.openxmlformats.org/presentationml/2006/main">
   <p:cSld>
     <p:spTree>
@@ -6540,7 +6694,7 @@
 </p:sld>
 </file>
 
-<file path=ppt/slides/slide12.xml><?xml version="1.0" encoding="utf-8"?>
+<file path=ppt/slides/slide13.xml><?xml version="1.0" encoding="utf-8"?>
 <p:sld xmlns:a="http://schemas.openxmlformats.org/drawingml/2006/main" xmlns:r="http://schemas.openxmlformats.org/officeDocument/2006/relationships" xmlns:p="http://schemas.openxmlformats.org/presentationml/2006/main">
   <p:cSld>
     <p:spTree>
@@ -6713,7 +6867,7 @@
 </p:sld>
 </file>
 
-<file path=ppt/slides/slide13.xml><?xml version="1.0" encoding="utf-8"?>
+<file path=ppt/slides/slide14.xml><?xml version="1.0" encoding="utf-8"?>
 <p:sld xmlns:a="http://schemas.openxmlformats.org/drawingml/2006/main" xmlns:r="http://schemas.openxmlformats.org/officeDocument/2006/relationships" xmlns:p="http://schemas.openxmlformats.org/presentationml/2006/main">
   <p:cSld>
     <p:spTree>
@@ -6942,7 +7096,7 @@
 </p:sld>
 </file>
 
-<file path=ppt/slides/slide14.xml><?xml version="1.0" encoding="utf-8"?>
+<file path=ppt/slides/slide15.xml><?xml version="1.0" encoding="utf-8"?>
 <p:sld xmlns:a="http://schemas.openxmlformats.org/drawingml/2006/main" xmlns:r="http://schemas.openxmlformats.org/officeDocument/2006/relationships" xmlns:p="http://schemas.openxmlformats.org/presentationml/2006/main">
   <p:cSld>
     <p:spTree>
@@ -7067,7 +7221,7 @@
 </p:sld>
 </file>
 
-<file path=ppt/slides/slide15.xml><?xml version="1.0" encoding="utf-8"?>
+<file path=ppt/slides/slide16.xml><?xml version="1.0" encoding="utf-8"?>
 <p:sld xmlns:a="http://schemas.openxmlformats.org/drawingml/2006/main" xmlns:r="http://schemas.openxmlformats.org/officeDocument/2006/relationships" xmlns:p="http://schemas.openxmlformats.org/presentationml/2006/main">
   <p:cSld>
     <p:spTree>
@@ -7181,7 +7335,7 @@
 </p:sld>
 </file>
 
-<file path=ppt/slides/slide16.xml><?xml version="1.0" encoding="utf-8"?>
+<file path=ppt/slides/slide17.xml><?xml version="1.0" encoding="utf-8"?>
 <p:sld xmlns:a="http://schemas.openxmlformats.org/drawingml/2006/main" xmlns:r="http://schemas.openxmlformats.org/officeDocument/2006/relationships" xmlns:p="http://schemas.openxmlformats.org/presentationml/2006/main">
   <p:cSld>
     <p:spTree>
@@ -7325,7 +7479,7 @@
 </p:sld>
 </file>
 
-<file path=ppt/slides/slide17.xml><?xml version="1.0" encoding="utf-8"?>
+<file path=ppt/slides/slide18.xml><?xml version="1.0" encoding="utf-8"?>
 <p:sld xmlns:a="http://schemas.openxmlformats.org/drawingml/2006/main" xmlns:r="http://schemas.openxmlformats.org/officeDocument/2006/relationships" xmlns:p="http://schemas.openxmlformats.org/presentationml/2006/main">
   <p:cSld>
     <p:spTree>
@@ -7411,7 +7565,7 @@
 </p:sld>
 </file>
 
-<file path=ppt/slides/slide18.xml><?xml version="1.0" encoding="utf-8"?>
+<file path=ppt/slides/slide19.xml><?xml version="1.0" encoding="utf-8"?>
 <p:sld xmlns:a="http://schemas.openxmlformats.org/drawingml/2006/main" xmlns:r="http://schemas.openxmlformats.org/officeDocument/2006/relationships" xmlns:p="http://schemas.openxmlformats.org/presentationml/2006/main">
   <p:cSld>
     <p:spTree>
@@ -7495,12 +7649,40 @@
           <a:chExt cx="0" cy="0"/>
         </a:xfrm>
       </p:grpSpPr>
+      <p:sp>
+        <p:nvSpPr>
+          <p:cNvPr id="2" name="Title 1">
+            <a:extLst>
+              <a:ext uri="{FF2B5EF4-FFF2-40B4-BE49-F238E27FC236}">
+                <a16:creationId xmlns:a16="http://schemas.microsoft.com/office/drawing/2014/main" id="{06687677-7164-AE02-4751-61CA433808C8}"/>
+              </a:ext>
+            </a:extLst>
+          </p:cNvPr>
+          <p:cNvSpPr>
+            <a:spLocks noGrp="1"/>
+          </p:cNvSpPr>
+          <p:nvPr>
+            <p:ph type="title"/>
+          </p:nvPr>
+        </p:nvSpPr>
+        <p:spPr/>
+        <p:txBody>
+          <a:bodyPr/>
+          <a:lstStyle/>
+          <a:p>
+            <a:r>
+              <a:rPr lang="en-US" dirty="0"/>
+              <a:t>Who are we?</a:t>
+            </a:r>
+          </a:p>
+        </p:txBody>
+      </p:sp>
       <p:pic>
         <p:nvPicPr>
-          <p:cNvPr id="6" name="Picture 5" descr="A person with long curly hair&#10;&#10;AI-generated content may be incorrect.">
-            <a:extLst>
-              <a:ext uri="{FF2B5EF4-FFF2-40B4-BE49-F238E27FC236}">
-                <a16:creationId xmlns:a16="http://schemas.microsoft.com/office/drawing/2014/main" id="{BEFFD824-5377-0470-60BA-16EC260EE67F}"/>
+          <p:cNvPr id="21" name="Picture 20" descr="A person with long curly hair&#10;&#10;AI-generated content may be incorrect.">
+            <a:extLst>
+              <a:ext uri="{FF2B5EF4-FFF2-40B4-BE49-F238E27FC236}">
+                <a16:creationId xmlns:a16="http://schemas.microsoft.com/office/drawing/2014/main" id="{61F22FE1-4A2B-FE20-E43B-C15535559E6F}"/>
               </a:ext>
             </a:extLst>
           </p:cNvPr>
@@ -7510,7 +7692,7 @@
           <p:nvPr/>
         </p:nvPicPr>
         <p:blipFill>
-          <a:blip r:embed="rId3"/>
+          <a:blip r:embed="rId2"/>
           <a:srcRect t="8975" r="8993" b="12146"/>
           <a:stretch>
             <a:fillRect/>
@@ -7528,43 +7710,10 @@
       </p:pic>
       <p:sp>
         <p:nvSpPr>
-          <p:cNvPr id="2" name="Title 1">
-            <a:extLst>
-              <a:ext uri="{FF2B5EF4-FFF2-40B4-BE49-F238E27FC236}">
-                <a16:creationId xmlns:a16="http://schemas.microsoft.com/office/drawing/2014/main" id="{B600A7A2-0702-96F3-E3B6-526076E21F42}"/>
-              </a:ext>
-            </a:extLst>
-          </p:cNvPr>
-          <p:cNvSpPr>
-            <a:spLocks noGrp="1"/>
-          </p:cNvSpPr>
-          <p:nvPr>
-            <p:ph type="title"/>
-          </p:nvPr>
-        </p:nvSpPr>
-        <p:spPr/>
-        <p:txBody>
-          <a:bodyPr/>
-          <a:lstStyle/>
-          <a:p>
-            <a:r>
-              <a:rPr lang="en-GB">
-                <a:latin typeface="Helmholtz Halvar Mittel Rg"/>
-              </a:rPr>
-              <a:t>Who are we?</a:t>
-            </a:r>
-            <a:endParaRPr lang="en-US">
-              <a:latin typeface="Helmholtz Halvar Mittel Rg"/>
-            </a:endParaRPr>
-          </a:p>
-        </p:txBody>
-      </p:sp>
-      <p:sp>
-        <p:nvSpPr>
-          <p:cNvPr id="3" name="Content Placeholder 2">
-            <a:extLst>
-              <a:ext uri="{FF2B5EF4-FFF2-40B4-BE49-F238E27FC236}">
-                <a16:creationId xmlns:a16="http://schemas.microsoft.com/office/drawing/2014/main" id="{15D300BC-E463-1825-E45B-F0B57472C3CD}"/>
+          <p:cNvPr id="22" name="Content Placeholder 2">
+            <a:extLst>
+              <a:ext uri="{FF2B5EF4-FFF2-40B4-BE49-F238E27FC236}">
+                <a16:creationId xmlns:a16="http://schemas.microsoft.com/office/drawing/2014/main" id="{C90321B1-BFE7-F908-BD7F-48EECBBF107D}"/>
               </a:ext>
             </a:extLst>
           </p:cNvPr>
@@ -7591,7 +7740,7 @@
               <a:buNone/>
             </a:pPr>
             <a:r>
-              <a:rPr lang="en-GB">
+              <a:rPr lang="en-GB" dirty="0">
                 <a:solidFill>
                   <a:schemeClr val="accent3"/>
                 </a:solidFill>
@@ -7599,7 +7748,7 @@
               </a:rPr>
               <a:t>What is our mission?</a:t>
             </a:r>
-            <a:endParaRPr lang="en-US">
+            <a:endParaRPr lang="en-US" dirty="0">
               <a:solidFill>
                 <a:schemeClr val="accent3"/>
               </a:solidFill>
@@ -7610,7 +7759,7 @@
               <a:buNone/>
             </a:pPr>
             <a:r>
-              <a:rPr lang="en-GB">
+              <a:rPr lang="en-GB" dirty="0">
                 <a:solidFill>
                   <a:schemeClr val="accent5">
                     <a:lumMod val="49000"/>
@@ -7625,7 +7774,7 @@
             <a:pPr marL="0" indent="0">
               <a:buNone/>
             </a:pPr>
-            <a:endParaRPr lang="en-GB">
+            <a:endParaRPr lang="en-GB" dirty="0">
               <a:latin typeface="Helmholtz Halvar Mittel Rg"/>
             </a:endParaRPr>
           </a:p>
@@ -7634,7 +7783,7 @@
               <a:buNone/>
             </a:pPr>
             <a:r>
-              <a:rPr lang="en-GB">
+              <a:rPr lang="en-GB" dirty="0">
                 <a:solidFill>
                   <a:schemeClr val="accent3"/>
                 </a:solidFill>
@@ -7642,7 +7791,7 @@
               </a:rPr>
               <a:t>How do we do it?</a:t>
             </a:r>
-            <a:endParaRPr lang="en-GB">
+            <a:endParaRPr lang="en-GB" dirty="0">
               <a:solidFill>
                 <a:schemeClr val="accent3"/>
               </a:solidFill>
@@ -7651,7 +7800,7 @@
           <a:p>
             <a:pPr marL="457200" indent="-457200"/>
             <a:r>
-              <a:rPr lang="en-GB">
+              <a:rPr lang="en-GB" dirty="0">
                 <a:solidFill>
                   <a:schemeClr val="accent5">
                     <a:lumMod val="49000"/>
@@ -7665,7 +7814,7 @@
           <a:p>
             <a:pPr marL="457200" indent="-457200"/>
             <a:r>
-              <a:rPr lang="en-GB">
+              <a:rPr lang="en-GB" dirty="0">
                 <a:solidFill>
                   <a:schemeClr val="accent5">
                     <a:lumMod val="49000"/>
@@ -7679,7 +7828,7 @@
           <a:p>
             <a:pPr marL="457200" indent="-457200"/>
             <a:r>
-              <a:rPr lang="en-GB">
+              <a:rPr lang="en-GB" dirty="0">
                 <a:solidFill>
                   <a:schemeClr val="accent5">
                     <a:lumMod val="49000"/>
@@ -7690,7 +7839,7 @@
               <a:t>Easy application</a:t>
             </a:r>
             <a:r>
-              <a:rPr lang="en-GB">
+              <a:rPr lang="en-GB" dirty="0">
                 <a:solidFill>
                   <a:schemeClr val="accent5">
                     <a:lumMod val="49000"/>
@@ -7701,7 +7850,7 @@
               </a:rPr>
               <a:t> </a:t>
             </a:r>
-            <a:endParaRPr lang="en-GB">
+            <a:endParaRPr lang="en-GB" dirty="0">
               <a:solidFill>
                 <a:schemeClr val="accent5">
                   <a:lumMod val="49000"/>
@@ -7715,21 +7864,21 @@
               <a:buNone/>
             </a:pPr>
             <a:r>
-              <a:rPr lang="en-GB">
+              <a:rPr lang="en-GB" dirty="0">
                 <a:latin typeface="Helmholtz Halvar Mittel Rg"/>
               </a:rPr>
               <a:t> </a:t>
             </a:r>
-            <a:endParaRPr lang="en-GB"/>
+            <a:endParaRPr lang="en-GB" dirty="0"/>
           </a:p>
         </p:txBody>
       </p:sp>
       <p:pic>
         <p:nvPicPr>
-          <p:cNvPr id="4" name="Picture 3" descr="A map of germany with blue dots and white text&#10;&#10;AI-generated content may be incorrect.">
-            <a:extLst>
-              <a:ext uri="{FF2B5EF4-FFF2-40B4-BE49-F238E27FC236}">
-                <a16:creationId xmlns:a16="http://schemas.microsoft.com/office/drawing/2014/main" id="{A87C231F-076A-3161-34A9-C5140C727512}"/>
+          <p:cNvPr id="23" name="Picture 22" descr="A map of germany with blue dots and white text&#10;&#10;AI-generated content may be incorrect.">
+            <a:extLst>
+              <a:ext uri="{FF2B5EF4-FFF2-40B4-BE49-F238E27FC236}">
+                <a16:creationId xmlns:a16="http://schemas.microsoft.com/office/drawing/2014/main" id="{576136C3-C6FE-5F85-218E-C56F8A1F3AFB}"/>
               </a:ext>
             </a:extLst>
           </p:cNvPr>
@@ -7739,7 +7888,7 @@
           <p:nvPr/>
         </p:nvPicPr>
         <p:blipFill>
-          <a:blip r:embed="rId4"/>
+          <a:blip r:embed="rId3"/>
           <a:srcRect b="2291"/>
           <a:stretch>
             <a:fillRect/>
@@ -7755,124 +7904,83 @@
           </a:prstGeom>
         </p:spPr>
       </p:pic>
-      <p:grpSp>
-        <p:nvGrpSpPr>
-          <p:cNvPr id="20" name="Group 19">
-            <a:extLst>
-              <a:ext uri="{FF2B5EF4-FFF2-40B4-BE49-F238E27FC236}">
-                <a16:creationId xmlns:a16="http://schemas.microsoft.com/office/drawing/2014/main" id="{B500C220-51A3-D04A-3541-09CB532BE2C7}"/>
-              </a:ext>
-            </a:extLst>
-          </p:cNvPr>
-          <p:cNvGrpSpPr/>
+      <p:sp>
+        <p:nvSpPr>
+          <p:cNvPr id="24" name="Rectangle 23">
+            <a:extLst>
+              <a:ext uri="{FF2B5EF4-FFF2-40B4-BE49-F238E27FC236}">
+                <a16:creationId xmlns:a16="http://schemas.microsoft.com/office/drawing/2014/main" id="{8E125131-7BF7-972B-5E5A-3B0FC97BAA92}"/>
+              </a:ext>
+            </a:extLst>
+          </p:cNvPr>
+          <p:cNvSpPr/>
           <p:nvPr/>
-        </p:nvGrpSpPr>
-        <p:grpSpPr>
+        </p:nvSpPr>
+        <p:spPr>
           <a:xfrm>
-            <a:off x="8241818" y="5391837"/>
-            <a:ext cx="855518" cy="1077853"/>
-            <a:chOff x="7505411" y="5400617"/>
-            <a:chExt cx="855518" cy="1077853"/>
+            <a:off x="8243838" y="6149304"/>
+            <a:ext cx="852922" cy="320386"/>
           </a:xfrm>
-        </p:grpSpPr>
-        <p:pic>
-          <p:nvPicPr>
-            <p:cNvPr id="8" name="Picture 7" descr="A person with short dark hair&#10;&#10;AI-generated content may be incorrect.">
-              <a:extLst>
-                <a:ext uri="{FF2B5EF4-FFF2-40B4-BE49-F238E27FC236}">
-                  <a16:creationId xmlns:a16="http://schemas.microsoft.com/office/drawing/2014/main" id="{354ECC37-9988-EF86-3FB6-F30D2EF861B3}"/>
-                </a:ext>
-              </a:extLst>
-            </p:cNvPr>
-            <p:cNvPicPr>
-              <a:picLocks noChangeAspect="1"/>
-            </p:cNvPicPr>
-            <p:nvPr/>
-          </p:nvPicPr>
-          <p:blipFill>
-            <a:blip r:embed="rId5"/>
-            <a:stretch>
-              <a:fillRect/>
-            </a:stretch>
-          </p:blipFill>
-          <p:spPr>
-            <a:xfrm>
-              <a:off x="7505411" y="5400617"/>
-              <a:ext cx="855518" cy="764252"/>
-            </a:xfrm>
-            <a:prstGeom prst="rect">
-              <a:avLst/>
-            </a:prstGeom>
-            <a:ln w="28575">
-              <a:solidFill>
-                <a:schemeClr val="bg1"/>
-              </a:solidFill>
-            </a:ln>
-          </p:spPr>
-        </p:pic>
-        <p:sp>
-          <p:nvSpPr>
-            <p:cNvPr id="12" name="Rectangle 11">
-              <a:extLst>
-                <a:ext uri="{FF2B5EF4-FFF2-40B4-BE49-F238E27FC236}">
-                  <a16:creationId xmlns:a16="http://schemas.microsoft.com/office/drawing/2014/main" id="{E9729E60-ACCD-B2C5-4C98-2EC09ACCA735}"/>
-                </a:ext>
-              </a:extLst>
-            </p:cNvPr>
-            <p:cNvSpPr/>
-            <p:nvPr/>
-          </p:nvSpPr>
-          <p:spPr>
-            <a:xfrm>
-              <a:off x="7507431" y="6158084"/>
-              <a:ext cx="852922" cy="320386"/>
-            </a:xfrm>
-            <a:prstGeom prst="rect">
-              <a:avLst/>
-            </a:prstGeom>
-          </p:spPr>
-          <p:style>
-            <a:lnRef idx="0">
-              <a:schemeClr val="accent3"/>
-            </a:lnRef>
-            <a:fillRef idx="3">
-              <a:schemeClr val="accent3"/>
-            </a:fillRef>
-            <a:effectRef idx="3">
-              <a:schemeClr val="accent3"/>
-            </a:effectRef>
-            <a:fontRef idx="minor">
-              <a:schemeClr val="lt1"/>
-            </a:fontRef>
-          </p:style>
-          <p:txBody>
-            <a:bodyPr rtlCol="0" anchor="ctr"/>
-            <a:lstStyle/>
-            <a:p>
-              <a:pPr algn="ctr"/>
-              <a:r>
-                <a:rPr lang="en-GB" sz="800" b="1">
-                  <a:solidFill>
-                    <a:srgbClr val="FEFFFF"/>
-                  </a:solidFill>
-                </a:rPr>
-                <a:t>Francesco Campi</a:t>
-              </a:r>
-              <a:endParaRPr lang="en-US" sz="800" b="1">
+          <a:prstGeom prst="rect">
+            <a:avLst/>
+          </a:prstGeom>
+        </p:spPr>
+        <p:style>
+          <a:lnRef idx="0">
+            <a:schemeClr val="accent3"/>
+          </a:lnRef>
+          <a:fillRef idx="3">
+            <a:schemeClr val="accent3"/>
+          </a:fillRef>
+          <a:effectRef idx="3">
+            <a:schemeClr val="accent3"/>
+          </a:effectRef>
+          <a:fontRef idx="minor">
+            <a:schemeClr val="lt1"/>
+          </a:fontRef>
+        </p:style>
+        <p:txBody>
+          <a:bodyPr rtlCol="0" anchor="ctr"/>
+          <a:lstStyle/>
+          <a:p>
+            <a:pPr algn="ctr"/>
+            <a:r>
+              <a:rPr lang="en-GB" sz="800" b="1" dirty="0">
                 <a:solidFill>
                   <a:srgbClr val="FEFFFF"/>
                 </a:solidFill>
-              </a:endParaRPr>
-            </a:p>
-          </p:txBody>
-        </p:sp>
-      </p:grpSp>
+              </a:rPr>
+              <a:t>Till </a:t>
+            </a:r>
+            <a:br>
+              <a:rPr lang="en-GB" sz="800" b="1" dirty="0">
+                <a:solidFill>
+                  <a:srgbClr val="FEFFFF"/>
+                </a:solidFill>
+              </a:rPr>
+            </a:br>
+            <a:r>
+              <a:rPr lang="en-GB" sz="800" b="1" dirty="0">
+                <a:solidFill>
+                  <a:srgbClr val="FEFFFF"/>
+                </a:solidFill>
+              </a:rPr>
+              <a:t>Korten</a:t>
+            </a:r>
+            <a:endParaRPr lang="en-US" sz="800" b="1" dirty="0">
+              <a:solidFill>
+                <a:srgbClr val="FEFFFF"/>
+              </a:solidFill>
+            </a:endParaRPr>
+          </a:p>
+        </p:txBody>
+      </p:sp>
       <p:grpSp>
         <p:nvGrpSpPr>
-          <p:cNvPr id="21" name="Group 20">
-            <a:extLst>
-              <a:ext uri="{FF2B5EF4-FFF2-40B4-BE49-F238E27FC236}">
-                <a16:creationId xmlns:a16="http://schemas.microsoft.com/office/drawing/2014/main" id="{09940732-1D8C-A557-72AD-DA8C53810DD2}"/>
+          <p:cNvPr id="25" name="Group 24">
+            <a:extLst>
+              <a:ext uri="{FF2B5EF4-FFF2-40B4-BE49-F238E27FC236}">
+                <a16:creationId xmlns:a16="http://schemas.microsoft.com/office/drawing/2014/main" id="{FE5C07E8-3259-A825-3E0D-CD720450553E}"/>
               </a:ext>
             </a:extLst>
           </p:cNvPr>
@@ -7889,10 +7997,10 @@
         </p:grpSpPr>
         <p:pic>
           <p:nvPicPr>
-            <p:cNvPr id="9" name="Picture 8" descr="A person smiling at the camera&#10;&#10;AI-generated content may be incorrect.">
+            <p:cNvPr id="26" name="Picture 25" descr="A person smiling at the camera&#10;&#10;AI-generated content may be incorrect.">
               <a:extLst>
                 <a:ext uri="{FF2B5EF4-FFF2-40B4-BE49-F238E27FC236}">
-                  <a16:creationId xmlns:a16="http://schemas.microsoft.com/office/drawing/2014/main" id="{CD4AF438-0D2E-617B-58CE-EEA606D1B178}"/>
+                  <a16:creationId xmlns:a16="http://schemas.microsoft.com/office/drawing/2014/main" id="{8821C1AD-3E10-39B2-5275-693403EDB58E}"/>
                 </a:ext>
               </a:extLst>
             </p:cNvPr>
@@ -7902,7 +8010,7 @@
             <p:nvPr/>
           </p:nvPicPr>
           <p:blipFill>
-            <a:blip r:embed="rId6"/>
+            <a:blip r:embed="rId4"/>
             <a:srcRect l="4477" t="2894" r="5505" b="5382"/>
             <a:stretch>
               <a:fillRect/>
@@ -7920,10 +8028,10 @@
         </p:pic>
         <p:sp>
           <p:nvSpPr>
-            <p:cNvPr id="16" name="Rectangle 15">
+            <p:cNvPr id="27" name="Rectangle 26">
               <a:extLst>
                 <a:ext uri="{FF2B5EF4-FFF2-40B4-BE49-F238E27FC236}">
-                  <a16:creationId xmlns:a16="http://schemas.microsoft.com/office/drawing/2014/main" id="{6D27842D-A5A0-3DBB-0D3F-94AA5DCBA214}"/>
+                  <a16:creationId xmlns:a16="http://schemas.microsoft.com/office/drawing/2014/main" id="{2EBE9F3E-60C5-A9BD-C83E-F89CF718C24B}"/>
                 </a:ext>
               </a:extLst>
             </p:cNvPr>
@@ -7989,10 +8097,10 @@
       </p:grpSp>
       <p:grpSp>
         <p:nvGrpSpPr>
-          <p:cNvPr id="22" name="Group 21">
-            <a:extLst>
-              <a:ext uri="{FF2B5EF4-FFF2-40B4-BE49-F238E27FC236}">
-                <a16:creationId xmlns:a16="http://schemas.microsoft.com/office/drawing/2014/main" id="{84CC2DA3-04D8-5348-728A-DA03B3EC730B}"/>
+          <p:cNvPr id="28" name="Group 27">
+            <a:extLst>
+              <a:ext uri="{FF2B5EF4-FFF2-40B4-BE49-F238E27FC236}">
+                <a16:creationId xmlns:a16="http://schemas.microsoft.com/office/drawing/2014/main" id="{96D502ED-1312-B031-5D43-7783BBDA18B6}"/>
               </a:ext>
             </a:extLst>
           </p:cNvPr>
@@ -8009,10 +8117,10 @@
         </p:grpSpPr>
         <p:pic>
           <p:nvPicPr>
-            <p:cNvPr id="7" name="Picture 6" descr="A person in a red and black plaid shirt&#10;&#10;AI-generated content may be incorrect.">
+            <p:cNvPr id="29" name="Picture 28" descr="A person in a red and black plaid shirt&#10;&#10;AI-generated content may be incorrect.">
               <a:extLst>
                 <a:ext uri="{FF2B5EF4-FFF2-40B4-BE49-F238E27FC236}">
-                  <a16:creationId xmlns:a16="http://schemas.microsoft.com/office/drawing/2014/main" id="{2DF243DD-E4EC-72E7-54A0-EB4008AA743F}"/>
+                  <a16:creationId xmlns:a16="http://schemas.microsoft.com/office/drawing/2014/main" id="{C4C95313-2B42-80CA-A5E7-8345E39C7FA1}"/>
                 </a:ext>
               </a:extLst>
             </p:cNvPr>
@@ -8022,7 +8130,7 @@
             <p:nvPr/>
           </p:nvPicPr>
           <p:blipFill>
-            <a:blip r:embed="rId7"/>
+            <a:blip r:embed="rId5"/>
             <a:srcRect l="7895" t="4249" r="15789" b="27708"/>
             <a:stretch>
               <a:fillRect/>
@@ -8040,10 +8148,10 @@
         </p:pic>
         <p:sp>
           <p:nvSpPr>
-            <p:cNvPr id="17" name="Rectangle 16">
+            <p:cNvPr id="30" name="Rectangle 29">
               <a:extLst>
                 <a:ext uri="{FF2B5EF4-FFF2-40B4-BE49-F238E27FC236}">
-                  <a16:creationId xmlns:a16="http://schemas.microsoft.com/office/drawing/2014/main" id="{26DD375E-69A3-4567-B7B5-F280B6B091BF}"/>
+                  <a16:creationId xmlns:a16="http://schemas.microsoft.com/office/drawing/2014/main" id="{78B97E78-D491-4745-0543-DEA080DDBC52}"/>
                 </a:ext>
               </a:extLst>
             </p:cNvPr>
@@ -8101,10 +8209,10 @@
       </p:grpSp>
       <p:sp>
         <p:nvSpPr>
-          <p:cNvPr id="19" name="Rectangle 18">
-            <a:extLst>
-              <a:ext uri="{FF2B5EF4-FFF2-40B4-BE49-F238E27FC236}">
-                <a16:creationId xmlns:a16="http://schemas.microsoft.com/office/drawing/2014/main" id="{6206867A-B3FE-D129-23C8-CFD37E510CF0}"/>
+          <p:cNvPr id="31" name="Rectangle 30">
+            <a:extLst>
+              <a:ext uri="{FF2B5EF4-FFF2-40B4-BE49-F238E27FC236}">
+                <a16:creationId xmlns:a16="http://schemas.microsoft.com/office/drawing/2014/main" id="{DFCE734B-7964-95B1-6862-8B52D82BE823}"/>
               </a:ext>
             </a:extLst>
           </p:cNvPr>
@@ -8153,10 +8261,10 @@
       </p:sp>
       <p:sp>
         <p:nvSpPr>
-          <p:cNvPr id="25" name="Rectangle 24">
-            <a:extLst>
-              <a:ext uri="{FF2B5EF4-FFF2-40B4-BE49-F238E27FC236}">
-                <a16:creationId xmlns:a16="http://schemas.microsoft.com/office/drawing/2014/main" id="{E381ED29-5381-1917-3F7F-1FC4F5A722BC}"/>
+          <p:cNvPr id="32" name="Rectangle 31">
+            <a:extLst>
+              <a:ext uri="{FF2B5EF4-FFF2-40B4-BE49-F238E27FC236}">
+                <a16:creationId xmlns:a16="http://schemas.microsoft.com/office/drawing/2014/main" id="{00A6AD53-4928-CCD3-41A0-05FC2DE0E911}"/>
               </a:ext>
             </a:extLst>
           </p:cNvPr>
@@ -8205,10 +8313,10 @@
       </p:sp>
       <p:sp>
         <p:nvSpPr>
-          <p:cNvPr id="26" name="Rectangle 25">
-            <a:extLst>
-              <a:ext uri="{FF2B5EF4-FFF2-40B4-BE49-F238E27FC236}">
-                <a16:creationId xmlns:a16="http://schemas.microsoft.com/office/drawing/2014/main" id="{6A8F99E3-B483-80A5-E178-DDB9C3B28E05}"/>
+          <p:cNvPr id="33" name="Rectangle 32">
+            <a:extLst>
+              <a:ext uri="{FF2B5EF4-FFF2-40B4-BE49-F238E27FC236}">
+                <a16:creationId xmlns:a16="http://schemas.microsoft.com/office/drawing/2014/main" id="{0885E578-3B38-7474-828B-1EF22B7EDDF9}"/>
               </a:ext>
             </a:extLst>
           </p:cNvPr>
@@ -8255,54 +8363,12 @@
           </a:p>
         </p:txBody>
       </p:sp>
-      <p:cxnSp>
-        <p:nvCxnSpPr>
-          <p:cNvPr id="27" name="Straight Arrow Connector 26">
-            <a:extLst>
-              <a:ext uri="{FF2B5EF4-FFF2-40B4-BE49-F238E27FC236}">
-                <a16:creationId xmlns:a16="http://schemas.microsoft.com/office/drawing/2014/main" id="{33C20AF7-7CD7-FE8A-A1FF-84C5E5E7D4B1}"/>
-              </a:ext>
-            </a:extLst>
-          </p:cNvPr>
-          <p:cNvCxnSpPr>
-            <a:cxnSpLocks/>
-            <a:endCxn id="28" idx="0"/>
-          </p:cNvCxnSpPr>
-          <p:nvPr/>
-        </p:nvCxnSpPr>
-        <p:spPr>
-          <a:xfrm>
-            <a:off x="9597214" y="4611843"/>
-            <a:ext cx="444426" cy="692272"/>
-          </a:xfrm>
-          <a:prstGeom prst="straightConnector1">
-            <a:avLst/>
-          </a:prstGeom>
-          <a:ln w="28575">
-            <a:tailEnd type="triangle"/>
-          </a:ln>
-        </p:spPr>
-        <p:style>
-          <a:lnRef idx="3">
-            <a:schemeClr val="dk1"/>
-          </a:lnRef>
-          <a:fillRef idx="0">
-            <a:schemeClr val="dk1"/>
-          </a:fillRef>
-          <a:effectRef idx="2">
-            <a:schemeClr val="dk1"/>
-          </a:effectRef>
-          <a:fontRef idx="minor">
-            <a:schemeClr val="tx1"/>
-          </a:fontRef>
-        </p:style>
-      </p:cxnSp>
-      <p:sp>
-        <p:nvSpPr>
-          <p:cNvPr id="28" name="Rectangle 27">
-            <a:extLst>
-              <a:ext uri="{FF2B5EF4-FFF2-40B4-BE49-F238E27FC236}">
-                <a16:creationId xmlns:a16="http://schemas.microsoft.com/office/drawing/2014/main" id="{BD05A9C7-C93D-75F0-3DEF-CCAE67007EC8}"/>
+      <p:sp>
+        <p:nvSpPr>
+          <p:cNvPr id="35" name="Rectangle 34">
+            <a:extLst>
+              <a:ext uri="{FF2B5EF4-FFF2-40B4-BE49-F238E27FC236}">
+                <a16:creationId xmlns:a16="http://schemas.microsoft.com/office/drawing/2014/main" id="{AEBA96D6-30FB-F163-2A03-23C591B69A22}"/>
               </a:ext>
             </a:extLst>
           </p:cNvPr>
@@ -8351,10 +8417,10 @@
       </p:sp>
       <p:sp>
         <p:nvSpPr>
-          <p:cNvPr id="11" name="TextBox 10">
-            <a:extLst>
-              <a:ext uri="{FF2B5EF4-FFF2-40B4-BE49-F238E27FC236}">
-                <a16:creationId xmlns:a16="http://schemas.microsoft.com/office/drawing/2014/main" id="{EBEE7F27-90B7-2B8C-A30C-E6BF8B94F965}"/>
+          <p:cNvPr id="36" name="TextBox 35">
+            <a:extLst>
+              <a:ext uri="{FF2B5EF4-FFF2-40B4-BE49-F238E27FC236}">
+                <a16:creationId xmlns:a16="http://schemas.microsoft.com/office/drawing/2014/main" id="{D3CC7DC6-67E0-E5EC-42B2-BC2E8B04548F}"/>
               </a:ext>
             </a:extLst>
           </p:cNvPr>
@@ -8384,7 +8450,7 @@
               <a:rPr lang="en-US" sz="2000">
                 <a:latin typeface="Helmholtz Halvar Mittel Rg"/>
                 <a:cs typeface="Segoe UI"/>
-                <a:hlinkClick r:id="rId8"/>
+                <a:hlinkClick r:id="rId6"/>
               </a:rPr>
               <a:t>https://voucher-system.helmholtz.ai/</a:t>
             </a:r>
@@ -8401,10 +8467,10 @@
       </p:sp>
       <p:pic>
         <p:nvPicPr>
-          <p:cNvPr id="5" name="Picture 4">
-            <a:extLst>
-              <a:ext uri="{FF2B5EF4-FFF2-40B4-BE49-F238E27FC236}">
-                <a16:creationId xmlns:a16="http://schemas.microsoft.com/office/drawing/2014/main" id="{A9609E7D-4D61-B48E-AA4D-095B771EBBAE}"/>
+          <p:cNvPr id="37" name="Picture 36">
+            <a:extLst>
+              <a:ext uri="{FF2B5EF4-FFF2-40B4-BE49-F238E27FC236}">
+                <a16:creationId xmlns:a16="http://schemas.microsoft.com/office/drawing/2014/main" id="{6B077EF5-7632-92ED-706F-A453A941B2DA}"/>
               </a:ext>
               <a:ext uri="{C183D7F6-B498-43B3-948B-1728B52AA6E4}">
                 <adec:decorative xmlns:adec="http://schemas.microsoft.com/office/drawing/2017/decorative" val="1"/>
@@ -8417,7 +8483,7 @@
           <p:nvPr/>
         </p:nvPicPr>
         <p:blipFill>
-          <a:blip r:embed="rId9"/>
+          <a:blip r:embed="rId7"/>
           <a:stretch>
             <a:fillRect/>
           </a:stretch>
@@ -8432,25 +8498,322 @@
           </a:prstGeom>
         </p:spPr>
       </p:pic>
+      <p:sp>
+        <p:nvSpPr>
+          <p:cNvPr id="38" name="Rectangle 37">
+            <a:extLst>
+              <a:ext uri="{FF2B5EF4-FFF2-40B4-BE49-F238E27FC236}">
+                <a16:creationId xmlns:a16="http://schemas.microsoft.com/office/drawing/2014/main" id="{82271D58-8D99-BB95-3F4D-8D28071C1136}"/>
+              </a:ext>
+            </a:extLst>
+          </p:cNvPr>
+          <p:cNvSpPr/>
+          <p:nvPr/>
+        </p:nvSpPr>
+        <p:spPr>
+          <a:xfrm>
+            <a:off x="10047220" y="5375356"/>
+            <a:ext cx="852715" cy="1088572"/>
+          </a:xfrm>
+          <a:prstGeom prst="rect">
+            <a:avLst/>
+          </a:prstGeom>
+          <a:noFill/>
+          <a:ln w="57150">
+            <a:solidFill>
+              <a:schemeClr val="accent1"/>
+            </a:solidFill>
+          </a:ln>
+        </p:spPr>
+        <p:style>
+          <a:lnRef idx="2">
+            <a:schemeClr val="accent1">
+              <a:shade val="15000"/>
+            </a:schemeClr>
+          </a:lnRef>
+          <a:fillRef idx="1">
+            <a:schemeClr val="accent1"/>
+          </a:fillRef>
+          <a:effectRef idx="0">
+            <a:schemeClr val="accent1"/>
+          </a:effectRef>
+          <a:fontRef idx="minor">
+            <a:schemeClr val="lt1"/>
+          </a:fontRef>
+        </p:style>
+        <p:txBody>
+          <a:bodyPr rtlCol="0" anchor="ctr"/>
+          <a:lstStyle/>
+          <a:p>
+            <a:pPr algn="ctr"/>
+            <a:endParaRPr lang="en-GB"/>
+          </a:p>
+        </p:txBody>
+      </p:sp>
     </p:spTree>
     <p:extLst>
       <p:ext uri="{BB962C8B-B14F-4D97-AF65-F5344CB8AC3E}">
-        <p14:creationId xmlns:p14="http://schemas.microsoft.com/office/powerpoint/2010/main" val="2134603111"/>
+        <p14:creationId xmlns:p14="http://schemas.microsoft.com/office/powerpoint/2010/main" val="3264558183"/>
       </p:ext>
     </p:extLst>
   </p:cSld>
   <p:clrMapOvr>
     <a:masterClrMapping/>
   </p:clrMapOvr>
-  <p:extLst>
-    <p:ext uri="{6950BFC3-D8DA-4A85-94F7-54DA5524770B}">
-      <p188:commentRel xmlns:p188="http://schemas.microsoft.com/office/powerpoint/2018/8/main" r:id="rId2"/>
-    </p:ext>
-  </p:extLst>
+</p:sld>
+</file>
+
+<file path=ppt/slides/slide20.xml><?xml version="1.0" encoding="utf-8"?>
+<p:sld xmlns:a="http://schemas.openxmlformats.org/drawingml/2006/main" xmlns:r="http://schemas.openxmlformats.org/officeDocument/2006/relationships" xmlns:p="http://schemas.openxmlformats.org/presentationml/2006/main">
+  <p:cSld>
+    <p:spTree>
+      <p:nvGrpSpPr>
+        <p:cNvPr id="1" name=""/>
+        <p:cNvGrpSpPr/>
+        <p:nvPr/>
+      </p:nvGrpSpPr>
+      <p:grpSpPr>
+        <a:xfrm>
+          <a:off x="0" y="0"/>
+          <a:ext cx="0" cy="0"/>
+          <a:chOff x="0" y="0"/>
+          <a:chExt cx="0" cy="0"/>
+        </a:xfrm>
+      </p:grpSpPr>
+      <p:sp>
+        <p:nvSpPr>
+          <p:cNvPr id="2" name="Title 1">
+            <a:extLst>
+              <a:ext uri="{FF2B5EF4-FFF2-40B4-BE49-F238E27FC236}">
+                <a16:creationId xmlns:a16="http://schemas.microsoft.com/office/drawing/2014/main" id="{AB52AF6C-77AC-0404-BE93-550CB49DA788}"/>
+              </a:ext>
+            </a:extLst>
+          </p:cNvPr>
+          <p:cNvSpPr>
+            <a:spLocks noGrp="1"/>
+          </p:cNvSpPr>
+          <p:nvPr>
+            <p:ph type="title"/>
+          </p:nvPr>
+        </p:nvSpPr>
+        <p:spPr/>
+        <p:txBody>
+          <a:bodyPr/>
+          <a:lstStyle/>
+          <a:p>
+            <a:r>
+              <a:rPr lang="en-US" dirty="0">
+                <a:latin typeface="Hermann Bold"/>
+              </a:rPr>
+              <a:t>Resources</a:t>
+            </a:r>
+            <a:endParaRPr lang="en-US" dirty="0"/>
+          </a:p>
+        </p:txBody>
+      </p:sp>
+      <p:sp>
+        <p:nvSpPr>
+          <p:cNvPr id="3" name="Content Placeholder 2">
+            <a:extLst>
+              <a:ext uri="{FF2B5EF4-FFF2-40B4-BE49-F238E27FC236}">
+                <a16:creationId xmlns:a16="http://schemas.microsoft.com/office/drawing/2014/main" id="{C62F5EB8-569E-B1DF-A199-00BEF215F656}"/>
+              </a:ext>
+            </a:extLst>
+          </p:cNvPr>
+          <p:cNvSpPr>
+            <a:spLocks noGrp="1"/>
+          </p:cNvSpPr>
+          <p:nvPr>
+            <p:ph idx="1"/>
+          </p:nvPr>
+        </p:nvSpPr>
+        <p:spPr/>
+        <p:txBody>
+          <a:bodyPr vert="horz" lIns="91440" tIns="45720" rIns="91440" bIns="45720" rtlCol="0" anchor="t">
+            <a:normAutofit/>
+          </a:bodyPr>
+          <a:lstStyle/>
+          <a:p>
+            <a:r>
+              <a:rPr lang="en-US" dirty="0">
+                <a:latin typeface="Helmholtz Halvar Mittel Rg"/>
+              </a:rPr>
+              <a:t>Introductory slides : </a:t>
+            </a:r>
+            <a:r>
+              <a:rPr lang="en-US" dirty="0">
+                <a:latin typeface="Helmholtz Halvar Mittel Rg"/>
+                <a:hlinkClick r:id="rId2"/>
+              </a:rPr>
+              <a:t>https://github.com/Helmholtz-AI-Matter/coding-assistants</a:t>
+            </a:r>
+            <a:endParaRPr lang="en-US"/>
+          </a:p>
+          <a:p>
+            <a:r>
+              <a:rPr lang="en-US" dirty="0">
+                <a:latin typeface="Helmholtz Halvar Mittel Rg"/>
+              </a:rPr>
+              <a:t>Slides on hands-on session : </a:t>
+            </a:r>
+            <a:r>
+              <a:rPr lang="en-US" dirty="0">
+                <a:latin typeface="Helmholtz Halvar Mittel Rg"/>
+                <a:hlinkClick r:id="rId3"/>
+              </a:rPr>
+              <a:t>https://github.com/HelmholtzAI-Consultants-Munich/agentic-coding-hands-on</a:t>
+            </a:r>
+            <a:endParaRPr lang="en-US" dirty="0"/>
+          </a:p>
+          <a:p>
+            <a:r>
+              <a:rPr lang="en-US" dirty="0">
+                <a:latin typeface="Helmholtz Halvar Mittel Rg"/>
+              </a:rPr>
+              <a:t>Workshop page (shared with participants) : </a:t>
+            </a:r>
+            <a:r>
+              <a:rPr lang="en-US" dirty="0">
+                <a:latin typeface="Helmholtz Halvar Mittel Rg"/>
+                <a:hlinkClick r:id="rId4"/>
+              </a:rPr>
+              <a:t>https://notes.desy.de/OZCosgehTVeEJWbqQ3quwg?view</a:t>
+            </a:r>
+            <a:endParaRPr lang="en-US"/>
+          </a:p>
+        </p:txBody>
+      </p:sp>
+    </p:spTree>
+    <p:extLst>
+      <p:ext uri="{BB962C8B-B14F-4D97-AF65-F5344CB8AC3E}">
+        <p14:creationId xmlns:p14="http://schemas.microsoft.com/office/powerpoint/2010/main" val="59592465"/>
+      </p:ext>
+    </p:extLst>
+  </p:cSld>
+  <p:clrMapOvr>
+    <a:masterClrMapping/>
+  </p:clrMapOvr>
 </p:sld>
 </file>
 
 <file path=ppt/slides/slide3.xml><?xml version="1.0" encoding="utf-8"?>
+<p:sld xmlns:a="http://schemas.openxmlformats.org/drawingml/2006/main" xmlns:r="http://schemas.openxmlformats.org/officeDocument/2006/relationships" xmlns:p="http://schemas.openxmlformats.org/presentationml/2006/main">
+  <p:cSld>
+    <p:spTree>
+      <p:nvGrpSpPr>
+        <p:cNvPr id="1" name="">
+          <a:extLst>
+            <a:ext uri="{FF2B5EF4-FFF2-40B4-BE49-F238E27FC236}">
+              <a16:creationId xmlns:a16="http://schemas.microsoft.com/office/drawing/2014/main" id="{FF2E292C-FDB1-3094-28BB-21D4442EA065}"/>
+            </a:ext>
+          </a:extLst>
+        </p:cNvPr>
+        <p:cNvGrpSpPr/>
+        <p:nvPr/>
+      </p:nvGrpSpPr>
+      <p:grpSpPr>
+        <a:xfrm>
+          <a:off x="0" y="0"/>
+          <a:ext cx="0" cy="0"/>
+          <a:chOff x="0" y="0"/>
+          <a:chExt cx="0" cy="0"/>
+        </a:xfrm>
+      </p:grpSpPr>
+      <p:sp>
+        <p:nvSpPr>
+          <p:cNvPr id="2" name="Title 1">
+            <a:extLst>
+              <a:ext uri="{FF2B5EF4-FFF2-40B4-BE49-F238E27FC236}">
+                <a16:creationId xmlns:a16="http://schemas.microsoft.com/office/drawing/2014/main" id="{50840309-A6DD-C241-A2F1-A29C85A33BF7}"/>
+              </a:ext>
+            </a:extLst>
+          </p:cNvPr>
+          <p:cNvSpPr>
+            <a:spLocks noGrp="1"/>
+          </p:cNvSpPr>
+          <p:nvPr>
+            <p:ph type="title"/>
+          </p:nvPr>
+        </p:nvSpPr>
+        <p:spPr/>
+        <p:txBody>
+          <a:bodyPr/>
+          <a:lstStyle/>
+          <a:p>
+            <a:r>
+              <a:rPr lang="en-US" dirty="0"/>
+              <a:t>Agenda</a:t>
+            </a:r>
+          </a:p>
+        </p:txBody>
+      </p:sp>
+      <p:sp>
+        <p:nvSpPr>
+          <p:cNvPr id="3" name="Content Placeholder 2">
+            <a:extLst>
+              <a:ext uri="{FF2B5EF4-FFF2-40B4-BE49-F238E27FC236}">
+                <a16:creationId xmlns:a16="http://schemas.microsoft.com/office/drawing/2014/main" id="{B957B2A4-0174-3F3C-CBDF-C239A06EFC58}"/>
+              </a:ext>
+            </a:extLst>
+          </p:cNvPr>
+          <p:cNvSpPr>
+            <a:spLocks noGrp="1"/>
+          </p:cNvSpPr>
+          <p:nvPr>
+            <p:ph idx="1"/>
+          </p:nvPr>
+        </p:nvSpPr>
+        <p:spPr/>
+        <p:txBody>
+          <a:bodyPr vert="horz" lIns="91440" tIns="45720" rIns="91440" bIns="45720" rtlCol="0" anchor="t">
+            <a:normAutofit/>
+          </a:bodyPr>
+          <a:lstStyle/>
+          <a:p>
+            <a:r>
+              <a:rPr lang="en-US" dirty="0"/>
+              <a:t>Intro to agentic coding</a:t>
+            </a:r>
+          </a:p>
+          <a:p>
+            <a:r>
+              <a:rPr lang="en-US" dirty="0">
+                <a:latin typeface="Helmholtz Halvar Mittel Rg"/>
+              </a:rPr>
+              <a:t>Software engineering practices with Agentic coding</a:t>
+            </a:r>
+            <a:endParaRPr lang="en-US" dirty="0"/>
+          </a:p>
+          <a:p>
+            <a:r>
+              <a:rPr lang="en-US" dirty="0">
+                <a:latin typeface="Helmholtz Halvar Mittel Rg"/>
+              </a:rPr>
+              <a:t>Setup (OpenCode + Blablador API key)</a:t>
+            </a:r>
+          </a:p>
+          <a:p>
+            <a:r>
+              <a:rPr lang="en-US" dirty="0"/>
+              <a:t>Hands-on implementation (+ presentations at the end)</a:t>
+            </a:r>
+          </a:p>
+        </p:txBody>
+      </p:sp>
+    </p:spTree>
+    <p:extLst>
+      <p:ext uri="{BB962C8B-B14F-4D97-AF65-F5344CB8AC3E}">
+        <p14:creationId xmlns:p14="http://schemas.microsoft.com/office/powerpoint/2010/main" val="604278575"/>
+      </p:ext>
+    </p:extLst>
+  </p:cSld>
+  <p:clrMapOvr>
+    <a:masterClrMapping/>
+  </p:clrMapOvr>
+</p:sld>
+</file>
+
+<file path=ppt/slides/slide4.xml><?xml version="1.0" encoding="utf-8"?>
 <p:sld xmlns:a="http://schemas.openxmlformats.org/drawingml/2006/main" xmlns:r="http://schemas.openxmlformats.org/officeDocument/2006/relationships" xmlns:p="http://schemas.openxmlformats.org/presentationml/2006/main">
   <p:cSld>
     <p:spTree>
@@ -9270,7 +9633,7 @@
 </p:sld>
 </file>
 
-<file path=ppt/slides/slide4.xml><?xml version="1.0" encoding="utf-8"?>
+<file path=ppt/slides/slide5.xml><?xml version="1.0" encoding="utf-8"?>
 <p:sld xmlns:a="http://schemas.openxmlformats.org/drawingml/2006/main" xmlns:r="http://schemas.openxmlformats.org/officeDocument/2006/relationships" xmlns:p="http://schemas.openxmlformats.org/presentationml/2006/main">
   <p:cSld>
     <p:spTree>
@@ -10362,7 +10725,7 @@
 </p:sld>
 </file>
 
-<file path=ppt/slides/slide5.xml><?xml version="1.0" encoding="utf-8"?>
+<file path=ppt/slides/slide6.xml><?xml version="1.0" encoding="utf-8"?>
 <p:sld xmlns:a="http://schemas.openxmlformats.org/drawingml/2006/main" xmlns:r="http://schemas.openxmlformats.org/officeDocument/2006/relationships" xmlns:p="http://schemas.openxmlformats.org/presentationml/2006/main">
   <p:cSld>
     <p:spTree>
@@ -10720,10 +11083,15 @@
   <p:clrMapOvr>
     <a:masterClrMapping/>
   </p:clrMapOvr>
+  <p:extLst>
+    <p:ext uri="{6950BFC3-D8DA-4A85-94F7-54DA5524770B}">
+      <p188:commentRel xmlns:p188="http://schemas.microsoft.com/office/powerpoint/2018/8/main" r:id="rId2"/>
+    </p:ext>
+  </p:extLst>
 </p:sld>
 </file>
 
-<file path=ppt/slides/slide6.xml><?xml version="1.0" encoding="utf-8"?>
+<file path=ppt/slides/slide7.xml><?xml version="1.0" encoding="utf-8"?>
 <p:sld xmlns:a="http://schemas.openxmlformats.org/drawingml/2006/main" xmlns:r="http://schemas.openxmlformats.org/officeDocument/2006/relationships" xmlns:p="http://schemas.openxmlformats.org/presentationml/2006/main">
   <p:cSld>
     <p:spTree>
@@ -11063,7 +11431,7 @@
 </p:sld>
 </file>
 
-<file path=ppt/slides/slide7.xml><?xml version="1.0" encoding="utf-8"?>
+<file path=ppt/slides/slide8.xml><?xml version="1.0" encoding="utf-8"?>
 <p:sld xmlns:a="http://schemas.openxmlformats.org/drawingml/2006/main" xmlns:r="http://schemas.openxmlformats.org/officeDocument/2006/relationships" xmlns:p="http://schemas.openxmlformats.org/presentationml/2006/main">
   <p:cSld>
     <p:spTree>
@@ -11359,7 +11727,7 @@
 </p:sld>
 </file>
 
-<file path=ppt/slides/slide8.xml><?xml version="1.0" encoding="utf-8"?>
+<file path=ppt/slides/slide9.xml><?xml version="1.0" encoding="utf-8"?>
 <p:sld xmlns:a="http://schemas.openxmlformats.org/drawingml/2006/main" xmlns:r="http://schemas.openxmlformats.org/officeDocument/2006/relationships" xmlns:p="http://schemas.openxmlformats.org/presentationml/2006/main">
   <p:cSld>
     <p:spTree>
@@ -11557,155 +11925,6 @@
     <p:extLst>
       <p:ext uri="{BB962C8B-B14F-4D97-AF65-F5344CB8AC3E}">
         <p14:creationId xmlns:p14="http://schemas.microsoft.com/office/powerpoint/2010/main" val="1650728092"/>
-      </p:ext>
-    </p:extLst>
-  </p:cSld>
-  <p:clrMapOvr>
-    <a:masterClrMapping/>
-  </p:clrMapOvr>
-</p:sld>
-</file>
-
-<file path=ppt/slides/slide9.xml><?xml version="1.0" encoding="utf-8"?>
-<p:sld xmlns:a="http://schemas.openxmlformats.org/drawingml/2006/main" xmlns:r="http://schemas.openxmlformats.org/officeDocument/2006/relationships" xmlns:p="http://schemas.openxmlformats.org/presentationml/2006/main">
-  <p:cSld>
-    <p:spTree>
-      <p:nvGrpSpPr>
-        <p:cNvPr id="1" name="">
-          <a:extLst>
-            <a:ext uri="{FF2B5EF4-FFF2-40B4-BE49-F238E27FC236}">
-              <a16:creationId xmlns:a16="http://schemas.microsoft.com/office/drawing/2014/main" id="{38879A09-4739-5874-F97F-F164C1ECB8BD}"/>
-            </a:ext>
-          </a:extLst>
-        </p:cNvPr>
-        <p:cNvGrpSpPr/>
-        <p:nvPr/>
-      </p:nvGrpSpPr>
-      <p:grpSpPr>
-        <a:xfrm>
-          <a:off x="0" y="0"/>
-          <a:ext cx="0" cy="0"/>
-          <a:chOff x="0" y="0"/>
-          <a:chExt cx="0" cy="0"/>
-        </a:xfrm>
-      </p:grpSpPr>
-      <p:sp>
-        <p:nvSpPr>
-          <p:cNvPr id="2" name="Title 1">
-            <a:extLst>
-              <a:ext uri="{FF2B5EF4-FFF2-40B4-BE49-F238E27FC236}">
-                <a16:creationId xmlns:a16="http://schemas.microsoft.com/office/drawing/2014/main" id="{AC3751AD-6B43-6BA2-4267-9EAE4D9036B5}"/>
-              </a:ext>
-            </a:extLst>
-          </p:cNvPr>
-          <p:cNvSpPr>
-            <a:spLocks noGrp="1"/>
-          </p:cNvSpPr>
-          <p:nvPr>
-            <p:ph type="title"/>
-          </p:nvPr>
-        </p:nvSpPr>
-        <p:spPr/>
-        <p:txBody>
-          <a:bodyPr/>
-          <a:lstStyle/>
-          <a:p>
-            <a:r>
-              <a:rPr lang="en-US" dirty="0"/>
-              <a:t>Design – tech stack</a:t>
-            </a:r>
-          </a:p>
-        </p:txBody>
-      </p:sp>
-      <p:sp>
-        <p:nvSpPr>
-          <p:cNvPr id="3" name="Content Placeholder 2">
-            <a:extLst>
-              <a:ext uri="{FF2B5EF4-FFF2-40B4-BE49-F238E27FC236}">
-                <a16:creationId xmlns:a16="http://schemas.microsoft.com/office/drawing/2014/main" id="{AF8A8254-BE80-995B-4E06-13DEB51780F7}"/>
-              </a:ext>
-            </a:extLst>
-          </p:cNvPr>
-          <p:cNvSpPr>
-            <a:spLocks noGrp="1"/>
-          </p:cNvSpPr>
-          <p:nvPr>
-            <p:ph idx="1"/>
-          </p:nvPr>
-        </p:nvSpPr>
-        <p:spPr>
-          <a:xfrm>
-            <a:off x="838200" y="1825625"/>
-            <a:ext cx="10764795" cy="4351338"/>
-          </a:xfrm>
-        </p:spPr>
-        <p:txBody>
-          <a:bodyPr>
-            <a:normAutofit fontScale="77500" lnSpcReduction="20000"/>
-          </a:bodyPr>
-          <a:lstStyle/>
-          <a:p>
-            <a:pPr marL="0" indent="0">
-              <a:buNone/>
-            </a:pPr>
-            <a:r>
-              <a:rPr lang="en-US" sz="3200" dirty="0"/>
-              <a:t>Drop your </a:t>
-            </a:r>
-            <a:r>
-              <a:rPr lang="en-US" sz="3200" dirty="0" err="1"/>
-              <a:t>SPEC.md</a:t>
-            </a:r>
-            <a:r>
-              <a:rPr lang="en-US" sz="3200" dirty="0"/>
-              <a:t> into an agent, and ask it:</a:t>
-            </a:r>
-          </a:p>
-          <a:p>
-            <a:r>
-              <a:rPr lang="en-US" sz="3200" dirty="0"/>
-              <a:t>Which coding frameworks can be used to achieve this (frontend, backend)?</a:t>
-            </a:r>
-          </a:p>
-          <a:p>
-            <a:r>
-              <a:rPr lang="en-US" sz="3200" dirty="0"/>
-              <a:t>What are the considerations for each of the frameworks. What are the limitations? </a:t>
-            </a:r>
-          </a:p>
-          <a:p>
-            <a:r>
-              <a:rPr lang="en-US" sz="3200" dirty="0"/>
-              <a:t>What is the best pipeline for testing and creating this software with you if my coding expertise is [your coding expertise]?</a:t>
-            </a:r>
-          </a:p>
-          <a:p>
-            <a:r>
-              <a:rPr lang="en-US" sz="3200" dirty="0"/>
-              <a:t>Which framework would you recommend, and why?</a:t>
-            </a:r>
-          </a:p>
-          <a:p>
-            <a:endParaRPr lang="en-US" sz="3200" dirty="0"/>
-          </a:p>
-          <a:p>
-            <a:endParaRPr lang="en-US" sz="3200" dirty="0"/>
-          </a:p>
-          <a:p>
-            <a:pPr marL="0" indent="0">
-              <a:buNone/>
-            </a:pPr>
-            <a:r>
-              <a:rPr lang="en-US" sz="3200" u="sng" dirty="0"/>
-              <a:t>Do not let the agent implement JavaScript or Python or [your language of choice] from scratch! Use a framework!</a:t>
-            </a:r>
-          </a:p>
-        </p:txBody>
-      </p:sp>
-    </p:spTree>
-    <p:extLst>
-      <p:ext uri="{BB962C8B-B14F-4D97-AF65-F5344CB8AC3E}">
-        <p14:creationId xmlns:p14="http://schemas.microsoft.com/office/powerpoint/2010/main" val="450628607"/>
       </p:ext>
     </p:extLst>
   </p:cSld>

--- a/agentic_coding_workshop.pptx
+++ b/agentic_coding_workshop.pptx
@@ -144,10 +144,85 @@
 <file path=ppt/revisionInfo.xml><?xml version="1.0" encoding="utf-8"?>
 <p1510:revInfo xmlns:a="http://schemas.openxmlformats.org/drawingml/2006/main" xmlns:r="http://schemas.openxmlformats.org/officeDocument/2006/relationships" xmlns:p1510="http://schemas.microsoft.com/office/powerpoint/2015/10/main">
   <p1510:revLst>
-    <p1510:client id="{00000000-0000-0000-0000-000000000000}" v="33" dt="2026-09-30T12:39:59.789"/>
-    <p1510:client id="{6D32B66A-7F52-BE46-8892-14610C4870D4}" v="2" dt="2026-09-30T10:49:16.953"/>
+    <p1510:client id="{ADA1EC97-F20D-B71B-3B2D-8DE8023AD29F}" v="1" dt="2026-10-08T07:40:38.766"/>
   </p1510:revLst>
 </p1510:revInfo>
+</file>
+
+<file path=ppt/changesInfos/changesInfo1.xml><?xml version="1.0" encoding="utf-8"?>
+<pc:chgInfo xmlns:a="http://schemas.openxmlformats.org/drawingml/2006/main" xmlns:r="http://schemas.openxmlformats.org/officeDocument/2006/relationships" xmlns:ac="http://schemas.microsoft.com/office/drawing/2013/main/command" xmlns:pc="http://schemas.microsoft.com/office/powerpoint/2013/main/command">
+  <pc:docChgLst>
+    <pc:chgData name="Karol Szustakowski" userId="S::karol.szustakowski@helmholtz-munich.de::282ee47c-8994-4b65-b6d1-8cc0c2e6df54" providerId="AD" clId="Web-{ADA1EC97-F20D-B71B-3B2D-8DE8023AD29F}"/>
+    <pc:docChg chg="modSld">
+      <pc:chgData name="Karol Szustakowski" userId="S::karol.szustakowski@helmholtz-munich.de::282ee47c-8994-4b65-b6d1-8cc0c2e6df54" providerId="AD" clId="Web-{ADA1EC97-F20D-B71B-3B2D-8DE8023AD29F}" dt="2026-10-08T07:40:38.766" v="0" actId="20577"/>
+      <pc:docMkLst>
+        <pc:docMk/>
+      </pc:docMkLst>
+      <pc:sldChg chg="modSp">
+        <pc:chgData name="Karol Szustakowski" userId="S::karol.szustakowski@helmholtz-munich.de::282ee47c-8994-4b65-b6d1-8cc0c2e6df54" providerId="AD" clId="Web-{ADA1EC97-F20D-B71B-3B2D-8DE8023AD29F}" dt="2026-10-08T07:40:38.766" v="0" actId="20577"/>
+        <pc:sldMkLst>
+          <pc:docMk/>
+          <pc:sldMk cId="2014965808" sldId="263"/>
+        </pc:sldMkLst>
+        <pc:spChg chg="mod">
+          <ac:chgData name="Karol Szustakowski" userId="S::karol.szustakowski@helmholtz-munich.de::282ee47c-8994-4b65-b6d1-8cc0c2e6df54" providerId="AD" clId="Web-{ADA1EC97-F20D-B71B-3B2D-8DE8023AD29F}" dt="2026-10-08T07:40:38.766" v="0" actId="20577"/>
+          <ac:spMkLst>
+            <pc:docMk/>
+            <pc:sldMk cId="2014965808" sldId="263"/>
+            <ac:spMk id="2" creationId="{1612A507-B4C6-752A-B485-56600500B5F5}"/>
+          </ac:spMkLst>
+        </pc:spChg>
+      </pc:sldChg>
+    </pc:docChg>
+  </pc:docChgLst>
+  <pc:docChgLst>
+    <pc:chgData name="Serena Sritharan" userId="S::serena.sritharan@helmholtz-munich.de::688c4a1b-6dbd-4f52-ae97-242ba5053018" providerId="AD" clId="Web-{00000000-0000-0000-0000-000000000000}"/>
+    <pc:docChg chg="mod addSld delSld modSld">
+      <pc:chgData name="Serena Sritharan" userId="S::serena.sritharan@helmholtz-munich.de::688c4a1b-6dbd-4f52-ae97-242ba5053018" providerId="AD" clId="Web-{00000000-0000-0000-0000-000000000000}" dt="2026-09-30T12:39:51.398" v="28" actId="20577"/>
+      <pc:docMkLst>
+        <pc:docMk/>
+      </pc:docMkLst>
+      <pc:sldChg chg="modSp">
+        <pc:chgData name="Serena Sritharan" userId="S::serena.sritharan@helmholtz-munich.de::688c4a1b-6dbd-4f52-ae97-242ba5053018" providerId="AD" clId="Web-{00000000-0000-0000-0000-000000000000}" dt="2026-09-30T12:37:06.163" v="9" actId="20577"/>
+        <pc:sldMkLst>
+          <pc:docMk/>
+          <pc:sldMk cId="604278575" sldId="354"/>
+        </pc:sldMkLst>
+        <pc:spChg chg="mod">
+          <ac:chgData name="Serena Sritharan" userId="S::serena.sritharan@helmholtz-munich.de::688c4a1b-6dbd-4f52-ae97-242ba5053018" providerId="AD" clId="Web-{00000000-0000-0000-0000-000000000000}" dt="2026-09-30T12:37:06.163" v="9" actId="20577"/>
+          <ac:spMkLst>
+            <pc:docMk/>
+            <pc:sldMk cId="604278575" sldId="354"/>
+            <ac:spMk id="3" creationId="{B957B2A4-0174-3F3C-CBDF-C239A06EFC58}"/>
+          </ac:spMkLst>
+        </pc:spChg>
+      </pc:sldChg>
+      <pc:sldChg chg="modSp new">
+        <pc:chgData name="Serena Sritharan" userId="S::serena.sritharan@helmholtz-munich.de::688c4a1b-6dbd-4f52-ae97-242ba5053018" providerId="AD" clId="Web-{00000000-0000-0000-0000-000000000000}" dt="2026-09-30T12:39:51.398" v="28" actId="20577"/>
+        <pc:sldMkLst>
+          <pc:docMk/>
+          <pc:sldMk cId="59592465" sldId="355"/>
+        </pc:sldMkLst>
+        <pc:spChg chg="mod">
+          <ac:chgData name="Serena Sritharan" userId="S::serena.sritharan@helmholtz-munich.de::688c4a1b-6dbd-4f52-ae97-242ba5053018" providerId="AD" clId="Web-{00000000-0000-0000-0000-000000000000}" dt="2026-09-30T12:38:58.039" v="17" actId="20577"/>
+          <ac:spMkLst>
+            <pc:docMk/>
+            <pc:sldMk cId="59592465" sldId="355"/>
+            <ac:spMk id="2" creationId="{AB52AF6C-77AC-0404-BE93-550CB49DA788}"/>
+          </ac:spMkLst>
+        </pc:spChg>
+        <pc:spChg chg="mod">
+          <ac:chgData name="Serena Sritharan" userId="S::serena.sritharan@helmholtz-munich.de::688c4a1b-6dbd-4f52-ae97-242ba5053018" providerId="AD" clId="Web-{00000000-0000-0000-0000-000000000000}" dt="2026-09-30T12:39:51.398" v="28" actId="20577"/>
+          <ac:spMkLst>
+            <pc:docMk/>
+            <pc:sldMk cId="59592465" sldId="355"/>
+            <ac:spMk id="3" creationId="{C62F5EB8-569E-B1DF-A199-00BEF215F656}"/>
+          </ac:spMkLst>
+        </pc:spChg>
+      </pc:sldChg>
+    </pc:docChg>
+  </pc:docChgLst>
+</pc:chgInfo>
 </file>
 
 <file path=ppt/comments/modernComment_105_8546D568.xml><?xml version="1.0" encoding="utf-8"?>
@@ -272,7 +347,7 @@
           <a:p>
             <a:fld id="{E9D6095D-AF69-4049-AC57-D67C18976B26}" type="datetimeFigureOut">
               <a:rPr lang="en-US" smtClean="0"/>
-              <a:t>9/30/2026</a:t>
+              <a:t>10/8/2026</a:t>
             </a:fld>
             <a:endParaRPr lang="en-US"/>
           </a:p>
@@ -1038,7 +1113,7 @@
             <a:fld id="{4212A532-6B12-6643-A678-AA9055583282}" type="datetimeFigureOut">
               <a:rPr lang="en-US" smtClean="0"/>
               <a:pPr/>
-              <a:t>9/30/2026</a:t>
+              <a:t>10/8/2026</a:t>
             </a:fld>
             <a:endParaRPr lang="en-US"/>
           </a:p>
@@ -1417,7 +1492,7 @@
           <a:p>
             <a:fld id="{4212A532-6B12-6643-A678-AA9055583282}" type="datetimeFigureOut">
               <a:rPr lang="en-US" smtClean="0"/>
-              <a:t>9/30/2026</a:t>
+              <a:t>10/8/2026</a:t>
             </a:fld>
             <a:endParaRPr lang="en-US"/>
           </a:p>
@@ -1593,7 +1668,7 @@
           <a:p>
             <a:fld id="{4212A532-6B12-6643-A678-AA9055583282}" type="datetimeFigureOut">
               <a:rPr lang="en-US" smtClean="0"/>
-              <a:t>9/30/2026</a:t>
+              <a:t>10/8/2026</a:t>
             </a:fld>
             <a:endParaRPr lang="en-US"/>
           </a:p>
@@ -1681,7 +1756,7 @@
           <a:p>
             <a:fld id="{4212A532-6B12-6643-A678-AA9055583282}" type="datetimeFigureOut">
               <a:rPr lang="en-US" smtClean="0"/>
-              <a:t>9/30/2026</a:t>
+              <a:t>10/8/2026</a:t>
             </a:fld>
             <a:endParaRPr lang="en-US"/>
           </a:p>
@@ -1973,7 +2048,7 @@
           <a:p>
             <a:fld id="{4212A532-6B12-6643-A678-AA9055583282}" type="datetimeFigureOut">
               <a:rPr lang="en-US" smtClean="0"/>
-              <a:t>9/30/2026</a:t>
+              <a:t>10/8/2026</a:t>
             </a:fld>
             <a:endParaRPr lang="en-US"/>
           </a:p>
@@ -2239,7 +2314,7 @@
           <a:p>
             <a:fld id="{4212A532-6B12-6643-A678-AA9055583282}" type="datetimeFigureOut">
               <a:rPr lang="en-US" smtClean="0"/>
-              <a:t>9/30/2026</a:t>
+              <a:t>10/8/2026</a:t>
             </a:fld>
             <a:endParaRPr lang="en-US"/>
           </a:p>
@@ -2414,7 +2489,7 @@
           <a:p>
             <a:fld id="{4212A532-6B12-6643-A678-AA9055583282}" type="datetimeFigureOut">
               <a:rPr lang="en-US" smtClean="0"/>
-              <a:t>9/30/2026</a:t>
+              <a:t>10/8/2026</a:t>
             </a:fld>
             <a:endParaRPr lang="en-US"/>
           </a:p>
@@ -2599,7 +2674,7 @@
           <a:p>
             <a:fld id="{4212A532-6B12-6643-A678-AA9055583282}" type="datetimeFigureOut">
               <a:rPr lang="en-US" smtClean="0"/>
-              <a:t>9/30/2026</a:t>
+              <a:t>10/8/2026</a:t>
             </a:fld>
             <a:endParaRPr lang="en-US"/>
           </a:p>
@@ -2716,7 +2791,7 @@
           <a:p>
             <a:fld id="{4212A532-6B12-6643-A678-AA9055583282}" type="datetimeFigureOut">
               <a:rPr lang="en-US" smtClean="0"/>
-              <a:t>9/30/2026</a:t>
+              <a:t>10/8/2026</a:t>
             </a:fld>
             <a:endParaRPr lang="en-US"/>
           </a:p>
@@ -2839,7 +2914,7 @@
             <a:fld id="{4212A532-6B12-6643-A678-AA9055583282}" type="datetimeFigureOut">
               <a:rPr lang="en-US" smtClean="0"/>
               <a:pPr/>
-              <a:t>9/30/2026</a:t>
+              <a:t>10/8/2026</a:t>
             </a:fld>
             <a:endParaRPr lang="en-US"/>
           </a:p>
@@ -3366,7 +3441,7 @@
           <a:p>
             <a:fld id="{4212A532-6B12-6643-A678-AA9055583282}" type="datetimeFigureOut">
               <a:rPr lang="en-US" smtClean="0"/>
-              <a:t>9/30/2026</a:t>
+              <a:t>10/8/2026</a:t>
             </a:fld>
             <a:endParaRPr lang="en-US"/>
           </a:p>
@@ -3551,7 +3626,7 @@
           <a:p>
             <a:fld id="{4212A532-6B12-6643-A678-AA9055583282}" type="datetimeFigureOut">
               <a:rPr lang="en-US" smtClean="0"/>
-              <a:t>9/30/2026</a:t>
+              <a:t>10/8/2026</a:t>
             </a:fld>
             <a:endParaRPr lang="en-US"/>
           </a:p>
@@ -4808,7 +4883,7 @@
           <a:p>
             <a:fld id="{4212A532-6B12-6643-A678-AA9055583282}" type="datetimeFigureOut">
               <a:rPr lang="en-US" smtClean="0"/>
-              <a:t>9/30/2026</a:t>
+              <a:t>10/8/2026</a:t>
             </a:fld>
             <a:endParaRPr lang="en-US"/>
           </a:p>
@@ -5087,7 +5162,7 @@
           <a:p>
             <a:fld id="{4212A532-6B12-6643-A678-AA9055583282}" type="datetimeFigureOut">
               <a:rPr lang="en-US" smtClean="0"/>
-              <a:t>9/30/2026</a:t>
+              <a:t>10/8/2026</a:t>
             </a:fld>
             <a:endParaRPr lang="en-US"/>
           </a:p>
@@ -5490,7 +5565,7 @@
           <a:p>
             <a:fld id="{4212A532-6B12-6643-A678-AA9055583282}" type="datetimeFigureOut">
               <a:rPr lang="en-US" smtClean="0"/>
-              <a:t>9/30/2026</a:t>
+              <a:t>10/8/2026</a:t>
             </a:fld>
             <a:endParaRPr lang="en-US"/>
           </a:p>
@@ -5745,7 +5820,7 @@
             <a:fld id="{4212A532-6B12-6643-A678-AA9055583282}" type="datetimeFigureOut">
               <a:rPr lang="en-US" smtClean="0"/>
               <a:pPr/>
-              <a:t>9/30/2026</a:t>
+              <a:t>10/8/2026</a:t>
             </a:fld>
             <a:endParaRPr lang="en-US"/>
           </a:p>
@@ -7552,6 +7627,36 @@
           </a:p>
         </p:txBody>
       </p:sp>
+      <p:pic>
+        <p:nvPicPr>
+          <p:cNvPr id="4" name="Picture 3" descr="QR code">
+            <a:extLst>
+              <a:ext uri="{FF2B5EF4-FFF2-40B4-BE49-F238E27FC236}">
+                <a16:creationId xmlns:a16="http://schemas.microsoft.com/office/drawing/2014/main" id="{2DDFD115-ED43-8044-62B1-7B258F110CDF}"/>
+              </a:ext>
+            </a:extLst>
+          </p:cNvPr>
+          <p:cNvPicPr>
+            <a:picLocks noChangeAspect="1"/>
+          </p:cNvPicPr>
+          <p:nvPr/>
+        </p:nvPicPr>
+        <p:blipFill>
+          <a:blip r:embed="rId2"/>
+          <a:stretch>
+            <a:fillRect/>
+          </a:stretch>
+        </p:blipFill>
+        <p:spPr>
+          <a:xfrm>
+            <a:off x="4428807" y="2331719"/>
+            <a:ext cx="3334385" cy="3334385"/>
+          </a:xfrm>
+          <a:prstGeom prst="rect">
+            <a:avLst/>
+          </a:prstGeom>
+        </p:spPr>
+      </p:pic>
     </p:spTree>
     <p:extLst>
       <p:ext uri="{BB962C8B-B14F-4D97-AF65-F5344CB8AC3E}">
@@ -7649,40 +7754,12 @@
           <a:chExt cx="0" cy="0"/>
         </a:xfrm>
       </p:grpSpPr>
-      <p:sp>
-        <p:nvSpPr>
-          <p:cNvPr id="2" name="Title 1">
-            <a:extLst>
-              <a:ext uri="{FF2B5EF4-FFF2-40B4-BE49-F238E27FC236}">
-                <a16:creationId xmlns:a16="http://schemas.microsoft.com/office/drawing/2014/main" id="{06687677-7164-AE02-4751-61CA433808C8}"/>
-              </a:ext>
-            </a:extLst>
-          </p:cNvPr>
-          <p:cNvSpPr>
-            <a:spLocks noGrp="1"/>
-          </p:cNvSpPr>
-          <p:nvPr>
-            <p:ph type="title"/>
-          </p:nvPr>
-        </p:nvSpPr>
-        <p:spPr/>
-        <p:txBody>
-          <a:bodyPr/>
-          <a:lstStyle/>
-          <a:p>
-            <a:r>
-              <a:rPr lang="en-US" dirty="0"/>
-              <a:t>Who are we?</a:t>
-            </a:r>
-          </a:p>
-        </p:txBody>
-      </p:sp>
       <p:pic>
         <p:nvPicPr>
-          <p:cNvPr id="21" name="Picture 20" descr="A person with long curly hair&#10;&#10;AI-generated content may be incorrect.">
-            <a:extLst>
-              <a:ext uri="{FF2B5EF4-FFF2-40B4-BE49-F238E27FC236}">
-                <a16:creationId xmlns:a16="http://schemas.microsoft.com/office/drawing/2014/main" id="{61F22FE1-4A2B-FE20-E43B-C15535559E6F}"/>
+          <p:cNvPr id="3" name="Picture 2">
+            <a:extLst>
+              <a:ext uri="{FF2B5EF4-FFF2-40B4-BE49-F238E27FC236}">
+                <a16:creationId xmlns:a16="http://schemas.microsoft.com/office/drawing/2014/main" id="{ADB79EC0-08D3-9F45-6CCB-993970605ABD}"/>
               </a:ext>
             </a:extLst>
           </p:cNvPr>
@@ -7693,6 +7770,64 @@
         </p:nvPicPr>
         <p:blipFill>
           <a:blip r:embed="rId2"/>
+          <a:stretch>
+            <a:fillRect/>
+          </a:stretch>
+        </p:blipFill>
+        <p:spPr>
+          <a:xfrm>
+            <a:off x="8280236" y="5383895"/>
+            <a:ext cx="785715" cy="785715"/>
+          </a:xfrm>
+          <a:prstGeom prst="rect">
+            <a:avLst/>
+          </a:prstGeom>
+        </p:spPr>
+      </p:pic>
+      <p:sp>
+        <p:nvSpPr>
+          <p:cNvPr id="2" name="Title 1">
+            <a:extLst>
+              <a:ext uri="{FF2B5EF4-FFF2-40B4-BE49-F238E27FC236}">
+                <a16:creationId xmlns:a16="http://schemas.microsoft.com/office/drawing/2014/main" id="{06687677-7164-AE02-4751-61CA433808C8}"/>
+              </a:ext>
+            </a:extLst>
+          </p:cNvPr>
+          <p:cNvSpPr>
+            <a:spLocks noGrp="1"/>
+          </p:cNvSpPr>
+          <p:nvPr>
+            <p:ph type="title"/>
+          </p:nvPr>
+        </p:nvSpPr>
+        <p:spPr/>
+        <p:txBody>
+          <a:bodyPr/>
+          <a:lstStyle/>
+          <a:p>
+            <a:r>
+              <a:rPr lang="en-US" dirty="0"/>
+              <a:t>Who are we?</a:t>
+            </a:r>
+          </a:p>
+        </p:txBody>
+      </p:sp>
+      <p:pic>
+        <p:nvPicPr>
+          <p:cNvPr id="21" name="Picture 20" descr="A person with long curly hair&#10;&#10;AI-generated content may be incorrect.">
+            <a:extLst>
+              <a:ext uri="{FF2B5EF4-FFF2-40B4-BE49-F238E27FC236}">
+                <a16:creationId xmlns:a16="http://schemas.microsoft.com/office/drawing/2014/main" id="{61F22FE1-4A2B-FE20-E43B-C15535559E6F}"/>
+              </a:ext>
+            </a:extLst>
+          </p:cNvPr>
+          <p:cNvPicPr>
+            <a:picLocks noChangeAspect="1"/>
+          </p:cNvPicPr>
+          <p:nvPr/>
+        </p:nvPicPr>
+        <p:blipFill>
+          <a:blip r:embed="rId3"/>
           <a:srcRect t="8975" r="8993" b="12146"/>
           <a:stretch>
             <a:fillRect/>
@@ -7888,7 +8023,7 @@
           <p:nvPr/>
         </p:nvPicPr>
         <p:blipFill>
-          <a:blip r:embed="rId3"/>
+          <a:blip r:embed="rId4"/>
           <a:srcRect b="2291"/>
           <a:stretch>
             <a:fillRect/>
@@ -8010,7 +8145,7 @@
             <p:nvPr/>
           </p:nvPicPr>
           <p:blipFill>
-            <a:blip r:embed="rId4"/>
+            <a:blip r:embed="rId5"/>
             <a:srcRect l="4477" t="2894" r="5505" b="5382"/>
             <a:stretch>
               <a:fillRect/>
@@ -8130,7 +8265,7 @@
             <p:nvPr/>
           </p:nvPicPr>
           <p:blipFill>
-            <a:blip r:embed="rId5"/>
+            <a:blip r:embed="rId6"/>
             <a:srcRect l="7895" t="4249" r="15789" b="27708"/>
             <a:stretch>
               <a:fillRect/>
@@ -8450,7 +8585,7 @@
               <a:rPr lang="en-US" sz="2000">
                 <a:latin typeface="Helmholtz Halvar Mittel Rg"/>
                 <a:cs typeface="Segoe UI"/>
-                <a:hlinkClick r:id="rId6"/>
+                <a:hlinkClick r:id="rId7"/>
               </a:rPr>
               <a:t>https://voucher-system.helmholtz.ai/</a:t>
             </a:r>
@@ -8483,7 +8618,7 @@
           <p:nvPr/>
         </p:nvPicPr>
         <p:blipFill>
-          <a:blip r:embed="rId7"/>
+          <a:blip r:embed="rId8"/>
           <a:stretch>
             <a:fillRect/>
           </a:stretch>
@@ -11476,9 +11611,12 @@
           <a:lstStyle/>
           <a:p>
             <a:r>
-              <a:rPr lang="en-US" dirty="0"/>
-              <a:t>planning</a:t>
-            </a:r>
+              <a:rPr lang="en-US">
+                <a:latin typeface="Hermann Bold"/>
+              </a:rPr>
+              <a:t>PLANNING</a:t>
+            </a:r>
+            <a:endParaRPr lang="en-US" dirty="0"/>
           </a:p>
         </p:txBody>
       </p:sp>

--- a/agentic_coding_workshop.pptx
+++ b/agentic_coding_workshop.pptx
@@ -227,7 +227,7 @@
 
 <file path=ppt/comments/modernComment_105_8546D568.xml><?xml version="1.0" encoding="utf-8"?>
 <p188:cmLst xmlns:a="http://schemas.openxmlformats.org/drawingml/2006/main" xmlns:r="http://schemas.openxmlformats.org/officeDocument/2006/relationships" xmlns:p188="http://schemas.microsoft.com/office/powerpoint/2018/8/main">
-  <p188:cm id="{21FDDEAD-4AEA-469D-B1D6-537E824A6D3C}" authorId="{D621C295-2579-9CF5-0A5A-C9EFD0ECDFFE}" created="2026-09-30T12:37:49.194">
+  <p188:cm id="{21FDDEAD-4AEA-469D-B1D6-537E824A6D3C}" authorId="{D621C295-2579-9CF5-0A5A-C9EFD0ECDFFE}" status="resolved" created="2026-09-30T12:37:49.194" complete="100000">
     <ac:txMkLst xmlns:ac="http://schemas.microsoft.com/office/drawing/2013/main/command">
       <pc:docMk xmlns:pc="http://schemas.microsoft.com/office/powerpoint/2013/main/command"/>
       <pc:sldMk xmlns:pc="http://schemas.microsoft.com/office/powerpoint/2013/main/command" cId="2236011880" sldId="261"/>
@@ -347,7 +347,7 @@
           <a:p>
             <a:fld id="{E9D6095D-AF69-4049-AC57-D67C18976B26}" type="datetimeFigureOut">
               <a:rPr lang="en-US" smtClean="0"/>
-              <a:t>10/8/2026</a:t>
+              <a:t>10/12/26</a:t>
             </a:fld>
             <a:endParaRPr lang="en-US"/>
           </a:p>
@@ -1113,7 +1113,7 @@
             <a:fld id="{4212A532-6B12-6643-A678-AA9055583282}" type="datetimeFigureOut">
               <a:rPr lang="en-US" smtClean="0"/>
               <a:pPr/>
-              <a:t>10/8/2026</a:t>
+              <a:t>10/12/26</a:t>
             </a:fld>
             <a:endParaRPr lang="en-US"/>
           </a:p>
@@ -1492,7 +1492,7 @@
           <a:p>
             <a:fld id="{4212A532-6B12-6643-A678-AA9055583282}" type="datetimeFigureOut">
               <a:rPr lang="en-US" smtClean="0"/>
-              <a:t>10/8/2026</a:t>
+              <a:t>10/12/26</a:t>
             </a:fld>
             <a:endParaRPr lang="en-US"/>
           </a:p>
@@ -1668,7 +1668,7 @@
           <a:p>
             <a:fld id="{4212A532-6B12-6643-A678-AA9055583282}" type="datetimeFigureOut">
               <a:rPr lang="en-US" smtClean="0"/>
-              <a:t>10/8/2026</a:t>
+              <a:t>10/12/26</a:t>
             </a:fld>
             <a:endParaRPr lang="en-US"/>
           </a:p>
@@ -1756,7 +1756,7 @@
           <a:p>
             <a:fld id="{4212A532-6B12-6643-A678-AA9055583282}" type="datetimeFigureOut">
               <a:rPr lang="en-US" smtClean="0"/>
-              <a:t>10/8/2026</a:t>
+              <a:t>10/12/26</a:t>
             </a:fld>
             <a:endParaRPr lang="en-US"/>
           </a:p>
@@ -2048,7 +2048,7 @@
           <a:p>
             <a:fld id="{4212A532-6B12-6643-A678-AA9055583282}" type="datetimeFigureOut">
               <a:rPr lang="en-US" smtClean="0"/>
-              <a:t>10/8/2026</a:t>
+              <a:t>10/12/26</a:t>
             </a:fld>
             <a:endParaRPr lang="en-US"/>
           </a:p>
@@ -2314,7 +2314,7 @@
           <a:p>
             <a:fld id="{4212A532-6B12-6643-A678-AA9055583282}" type="datetimeFigureOut">
               <a:rPr lang="en-US" smtClean="0"/>
-              <a:t>10/8/2026</a:t>
+              <a:t>10/12/26</a:t>
             </a:fld>
             <a:endParaRPr lang="en-US"/>
           </a:p>
@@ -2489,7 +2489,7 @@
           <a:p>
             <a:fld id="{4212A532-6B12-6643-A678-AA9055583282}" type="datetimeFigureOut">
               <a:rPr lang="en-US" smtClean="0"/>
-              <a:t>10/8/2026</a:t>
+              <a:t>10/12/26</a:t>
             </a:fld>
             <a:endParaRPr lang="en-US"/>
           </a:p>
@@ -2674,7 +2674,7 @@
           <a:p>
             <a:fld id="{4212A532-6B12-6643-A678-AA9055583282}" type="datetimeFigureOut">
               <a:rPr lang="en-US" smtClean="0"/>
-              <a:t>10/8/2026</a:t>
+              <a:t>10/12/26</a:t>
             </a:fld>
             <a:endParaRPr lang="en-US"/>
           </a:p>
@@ -2791,7 +2791,7 @@
           <a:p>
             <a:fld id="{4212A532-6B12-6643-A678-AA9055583282}" type="datetimeFigureOut">
               <a:rPr lang="en-US" smtClean="0"/>
-              <a:t>10/8/2026</a:t>
+              <a:t>10/12/26</a:t>
             </a:fld>
             <a:endParaRPr lang="en-US"/>
           </a:p>
@@ -2914,7 +2914,7 @@
             <a:fld id="{4212A532-6B12-6643-A678-AA9055583282}" type="datetimeFigureOut">
               <a:rPr lang="en-US" smtClean="0"/>
               <a:pPr/>
-              <a:t>10/8/2026</a:t>
+              <a:t>10/12/26</a:t>
             </a:fld>
             <a:endParaRPr lang="en-US"/>
           </a:p>
@@ -3441,7 +3441,7 @@
           <a:p>
             <a:fld id="{4212A532-6B12-6643-A678-AA9055583282}" type="datetimeFigureOut">
               <a:rPr lang="en-US" smtClean="0"/>
-              <a:t>10/8/2026</a:t>
+              <a:t>10/12/26</a:t>
             </a:fld>
             <a:endParaRPr lang="en-US"/>
           </a:p>
@@ -3626,7 +3626,7 @@
           <a:p>
             <a:fld id="{4212A532-6B12-6643-A678-AA9055583282}" type="datetimeFigureOut">
               <a:rPr lang="en-US" smtClean="0"/>
-              <a:t>10/8/2026</a:t>
+              <a:t>10/12/26</a:t>
             </a:fld>
             <a:endParaRPr lang="en-US"/>
           </a:p>
@@ -4883,7 +4883,7 @@
           <a:p>
             <a:fld id="{4212A532-6B12-6643-A678-AA9055583282}" type="datetimeFigureOut">
               <a:rPr lang="en-US" smtClean="0"/>
-              <a:t>10/8/2026</a:t>
+              <a:t>10/12/26</a:t>
             </a:fld>
             <a:endParaRPr lang="en-US"/>
           </a:p>
@@ -5162,7 +5162,7 @@
           <a:p>
             <a:fld id="{4212A532-6B12-6643-A678-AA9055583282}" type="datetimeFigureOut">
               <a:rPr lang="en-US" smtClean="0"/>
-              <a:t>10/8/2026</a:t>
+              <a:t>10/12/26</a:t>
             </a:fld>
             <a:endParaRPr lang="en-US"/>
           </a:p>
@@ -5565,7 +5565,7 @@
           <a:p>
             <a:fld id="{4212A532-6B12-6643-A678-AA9055583282}" type="datetimeFigureOut">
               <a:rPr lang="en-US" smtClean="0"/>
-              <a:t>10/8/2026</a:t>
+              <a:t>10/12/26</a:t>
             </a:fld>
             <a:endParaRPr lang="en-US"/>
           </a:p>
@@ -5820,7 +5820,7 @@
             <a:fld id="{4212A532-6B12-6643-A678-AA9055583282}" type="datetimeFigureOut">
               <a:rPr lang="en-US" smtClean="0"/>
               <a:pPr/>
-              <a:t>10/8/2026</a:t>
+              <a:t>10/12/26</a:t>
             </a:fld>
             <a:endParaRPr lang="en-US"/>
           </a:p>
@@ -7216,12 +7216,8 @@
           <a:lstStyle/>
           <a:p>
             <a:r>
-              <a:rPr lang="en-US" strike="sngStrike" dirty="0"/>
-              <a:t>Time to press play</a:t>
-            </a:r>
-            <a:r>
               <a:rPr lang="en-US" dirty="0"/>
-              <a:t>!</a:t>
+              <a:t>Before you start building</a:t>
             </a:r>
           </a:p>
         </p:txBody>
@@ -7627,36 +7623,6 @@
           </a:p>
         </p:txBody>
       </p:sp>
-      <p:pic>
-        <p:nvPicPr>
-          <p:cNvPr id="4" name="Picture 3" descr="QR code">
-            <a:extLst>
-              <a:ext uri="{FF2B5EF4-FFF2-40B4-BE49-F238E27FC236}">
-                <a16:creationId xmlns:a16="http://schemas.microsoft.com/office/drawing/2014/main" id="{2DDFD115-ED43-8044-62B1-7B258F110CDF}"/>
-              </a:ext>
-            </a:extLst>
-          </p:cNvPr>
-          <p:cNvPicPr>
-            <a:picLocks noChangeAspect="1"/>
-          </p:cNvPicPr>
-          <p:nvPr/>
-        </p:nvPicPr>
-        <p:blipFill>
-          <a:blip r:embed="rId2"/>
-          <a:stretch>
-            <a:fillRect/>
-          </a:stretch>
-        </p:blipFill>
-        <p:spPr>
-          <a:xfrm>
-            <a:off x="4428807" y="2331719"/>
-            <a:ext cx="3334385" cy="3334385"/>
-          </a:xfrm>
-          <a:prstGeom prst="rect">
-            <a:avLst/>
-          </a:prstGeom>
-        </p:spPr>
-      </p:pic>
     </p:spTree>
     <p:extLst>
       <p:ext uri="{BB962C8B-B14F-4D97-AF65-F5344CB8AC3E}">
